--- a/topic13-parsing/unit-13a-lectures/talk-2/b-xmlMd.pptx
+++ b/topic13-parsing/unit-13a-lectures/talk-2/b-xmlMd.pptx
@@ -5,7 +5,7 @@
     <p:sldMasterId id="2147483681" r:id="rId1"/>
   </p:sldMasterIdLst>
   <p:notesMasterIdLst>
-    <p:notesMasterId r:id="rId17"/>
+    <p:notesMasterId r:id="rId19"/>
   </p:notesMasterIdLst>
   <p:sldIdLst>
     <p:sldId id="257" r:id="rId2"/>
@@ -20,9 +20,11 @@
     <p:sldId id="272" r:id="rId11"/>
     <p:sldId id="262" r:id="rId12"/>
     <p:sldId id="263" r:id="rId13"/>
-    <p:sldId id="264" r:id="rId14"/>
-    <p:sldId id="265" r:id="rId15"/>
-    <p:sldId id="266" r:id="rId16"/>
+    <p:sldId id="273" r:id="rId14"/>
+    <p:sldId id="274" r:id="rId15"/>
+    <p:sldId id="264" r:id="rId16"/>
+    <p:sldId id="265" r:id="rId17"/>
+    <p:sldId id="266" r:id="rId18"/>
   </p:sldIdLst>
   <p:sldSz cx="12192000" cy="6858000"/>
   <p:notesSz cx="6858000" cy="9144000"/>
@@ -211,7 +213,7 @@
           <a:p>
             <a:fld id="{C9781662-63F7-F542-9481-DDDF56122A6C}" type="datetimeFigureOut">
               <a:rPr lang="en-US" smtClean="0"/>
-              <a:t>4/2/26</a:t>
+              <a:t>4/3/26</a:t>
             </a:fld>
             <a:endParaRPr lang="en-US"/>
           </a:p>
@@ -735,7 +737,7 @@
                 <a:tabLst/>
                 <a:defRPr/>
               </a:pPr>
-              <a:t>14</a:t>
+              <a:t>16</a:t>
             </a:fld>
             <a:endParaRPr kumimoji="0" lang="en-US" sz="1800" b="0" i="0" u="none" strike="noStrike" kern="1200" cap="none" spc="0" normalizeH="0" baseline="0" noProof="0">
               <a:ln>
@@ -879,7 +881,7 @@
                 <a:tabLst/>
                 <a:defRPr/>
               </a:pPr>
-              <a:t>15</a:t>
+              <a:t>17</a:t>
             </a:fld>
             <a:endParaRPr kumimoji="0" lang="en-US" sz="1800" b="0" i="0" u="none" strike="noStrike" kern="1200" cap="none" spc="0" normalizeH="0" baseline="0" noProof="0">
               <a:ln>
@@ -2031,7 +2033,7 @@
                 <a:tabLst/>
                 <a:defRPr/>
               </a:pPr>
-              <a:t>13</a:t>
+              <a:t>15</a:t>
             </a:fld>
             <a:endParaRPr kumimoji="0" lang="en-US" sz="1800" b="0" i="0" u="none" strike="noStrike" kern="1200" cap="none" spc="0" normalizeH="0" baseline="0" noProof="0">
               <a:ln>
@@ -2338,7 +2340,7 @@
             <a:fld id="{08B9EBBA-996F-894A-B54A-D6246ED52CEA}" type="datetimeFigureOut">
               <a:rPr lang="en-US" smtClean="0"/>
               <a:pPr/>
-              <a:t>4/2/26</a:t>
+              <a:t>4/3/26</a:t>
             </a:fld>
             <a:endParaRPr lang="en-US" dirty="0"/>
           </a:p>
@@ -2759,7 +2761,7 @@
             <a:fld id="{09B482E8-6E0E-1B4F-B1FD-C69DB9E858D9}" type="datetimeFigureOut">
               <a:rPr lang="en-US" smtClean="0"/>
               <a:pPr/>
-              <a:t>4/2/26</a:t>
+              <a:t>4/3/26</a:t>
             </a:fld>
             <a:endParaRPr lang="en-US" dirty="0"/>
           </a:p>
@@ -3102,7 +3104,7 @@
             <a:fld id="{09B482E8-6E0E-1B4F-B1FD-C69DB9E858D9}" type="datetimeFigureOut">
               <a:rPr lang="en-US" smtClean="0"/>
               <a:pPr/>
-              <a:t>4/2/26</a:t>
+              <a:t>4/3/26</a:t>
             </a:fld>
             <a:endParaRPr lang="en-US" dirty="0"/>
           </a:p>
@@ -3514,7 +3516,7 @@
             <a:fld id="{09B482E8-6E0E-1B4F-B1FD-C69DB9E858D9}" type="datetimeFigureOut">
               <a:rPr lang="en-US" smtClean="0"/>
               <a:pPr/>
-              <a:t>4/2/26</a:t>
+              <a:t>4/3/26</a:t>
             </a:fld>
             <a:endParaRPr lang="en-US" dirty="0"/>
           </a:p>
@@ -4089,7 +4091,7 @@
             <a:fld id="{09B482E8-6E0E-1B4F-B1FD-C69DB9E858D9}" type="datetimeFigureOut">
               <a:rPr lang="en-US" smtClean="0"/>
               <a:pPr/>
-              <a:t>4/2/26</a:t>
+              <a:t>4/3/26</a:t>
             </a:fld>
             <a:endParaRPr lang="en-US" dirty="0"/>
           </a:p>
@@ -4777,7 +4779,7 @@
             <a:fld id="{09B482E8-6E0E-1B4F-B1FD-C69DB9E858D9}" type="datetimeFigureOut">
               <a:rPr lang="en-US" smtClean="0"/>
               <a:pPr/>
-              <a:t>4/2/26</a:t>
+              <a:t>4/3/26</a:t>
             </a:fld>
             <a:endParaRPr lang="en-US" dirty="0"/>
           </a:p>
@@ -5697,7 +5699,7 @@
             <a:fld id="{09B482E8-6E0E-1B4F-B1FD-C69DB9E858D9}" type="datetimeFigureOut">
               <a:rPr lang="en-US" smtClean="0"/>
               <a:pPr/>
-              <a:t>4/2/26</a:t>
+              <a:t>4/3/26</a:t>
             </a:fld>
             <a:endParaRPr lang="en-US" dirty="0"/>
           </a:p>
@@ -6017,7 +6019,7 @@
             <a:fld id="{09B482E8-6E0E-1B4F-B1FD-C69DB9E858D9}" type="datetimeFigureOut">
               <a:rPr lang="en-US" smtClean="0"/>
               <a:pPr/>
-              <a:t>4/2/26</a:t>
+              <a:t>4/3/26</a:t>
             </a:fld>
             <a:endParaRPr lang="en-US" dirty="0"/>
           </a:p>
@@ -6288,7 +6290,7 @@
             <a:fld id="{09B482E8-6E0E-1B4F-B1FD-C69DB9E858D9}" type="datetimeFigureOut">
               <a:rPr lang="en-US" smtClean="0"/>
               <a:pPr/>
-              <a:t>4/2/26</a:t>
+              <a:t>4/3/26</a:t>
             </a:fld>
             <a:endParaRPr lang="en-US" dirty="0"/>
           </a:p>
@@ -6667,7 +6669,7 @@
             <a:fld id="{09B482E8-6E0E-1B4F-B1FD-C69DB9E858D9}" type="datetimeFigureOut">
               <a:rPr lang="en-US" smtClean="0"/>
               <a:pPr/>
-              <a:t>4/2/26</a:t>
+              <a:t>4/3/26</a:t>
             </a:fld>
             <a:endParaRPr lang="en-US" dirty="0"/>
           </a:p>
@@ -7063,7 +7065,7 @@
             <a:fld id="{8DFA1846-DA80-1C48-A609-854EA85C59AD}" type="datetimeFigureOut">
               <a:rPr lang="en-US" smtClean="0"/>
               <a:pPr/>
-              <a:t>4/2/26</a:t>
+              <a:t>4/3/26</a:t>
             </a:fld>
             <a:endParaRPr lang="en-US" dirty="0"/>
           </a:p>
@@ -7460,7 +7462,7 @@
             <a:fld id="{09B482E8-6E0E-1B4F-B1FD-C69DB9E858D9}" type="datetimeFigureOut">
               <a:rPr lang="en-US" smtClean="0"/>
               <a:pPr/>
-              <a:t>4/2/26</a:t>
+              <a:t>4/3/26</a:t>
             </a:fld>
             <a:endParaRPr lang="en-US" dirty="0"/>
           </a:p>
@@ -7973,7 +7975,7 @@
             <a:fld id="{09B482E8-6E0E-1B4F-B1FD-C69DB9E858D9}" type="datetimeFigureOut">
               <a:rPr lang="en-US" smtClean="0"/>
               <a:pPr/>
-              <a:t>4/2/26</a:t>
+              <a:t>4/3/26</a:t>
             </a:fld>
             <a:endParaRPr lang="en-US" dirty="0"/>
           </a:p>
@@ -8251,7 +8253,7 @@
             <a:fld id="{F13A34C8-038E-2045-AF43-DF7DBB8E0E9E}" type="datetimeFigureOut">
               <a:rPr lang="en-US" smtClean="0"/>
               <a:pPr/>
-              <a:t>4/2/26</a:t>
+              <a:t>4/3/26</a:t>
             </a:fld>
             <a:endParaRPr lang="en-US" dirty="0"/>
           </a:p>
@@ -8428,7 +8430,7 @@
             <a:fld id="{8818C68F-D26B-8F47-958C-23B49CF8A634}" type="datetimeFigureOut">
               <a:rPr lang="en-US" smtClean="0"/>
               <a:pPr/>
-              <a:t>4/2/26</a:t>
+              <a:t>4/3/26</a:t>
             </a:fld>
             <a:endParaRPr lang="en-US" dirty="0"/>
           </a:p>
@@ -8825,7 +8827,7 @@
             <a:fld id="{09B482E8-6E0E-1B4F-B1FD-C69DB9E858D9}" type="datetimeFigureOut">
               <a:rPr lang="en-US" smtClean="0"/>
               <a:pPr/>
-              <a:t>4/2/26</a:t>
+              <a:t>4/3/26</a:t>
             </a:fld>
             <a:endParaRPr lang="en-US" dirty="0"/>
           </a:p>
@@ -9241,7 +9243,7 @@
             <a:fld id="{09B482E8-6E0E-1B4F-B1FD-C69DB9E858D9}" type="datetimeFigureOut">
               <a:rPr lang="en-US" smtClean="0"/>
               <a:pPr/>
-              <a:t>4/2/26</a:t>
+              <a:t>4/3/26</a:t>
             </a:fld>
             <a:endParaRPr lang="en-US" dirty="0"/>
           </a:p>
@@ -9491,7 +9493,7 @@
           <a:p>
             <a:fld id="{57429F9B-64E3-0346-90C6-4B53BA166523}" type="datetimeFigureOut">
               <a:rPr lang="en-US" smtClean="0"/>
-              <a:t>4/2/26</a:t>
+              <a:t>4/3/26</a:t>
             </a:fld>
             <a:endParaRPr lang="en-US"/>
           </a:p>
@@ -14915,1453 +14917,455 @@
       </p:grpSpPr>
       <p:sp>
         <p:nvSpPr>
-          <p:cNvPr id="2" name="Shape 0"/>
-          <p:cNvSpPr/>
-          <p:nvPr/>
-        </p:nvSpPr>
-        <p:spPr>
-          <a:xfrm>
-            <a:off x="0" y="0"/>
-            <a:ext cx="12192000" cy="6858000"/>
-          </a:xfrm>
-          <a:prstGeom prst="rect">
-            <a:avLst/>
-          </a:prstGeom>
-          <a:gradFill>
-            <a:gsLst>
-              <a:gs pos="0">
-                <a:srgbClr val="1CBFCE"/>
-              </a:gs>
-              <a:gs pos="100000">
-                <a:srgbClr val="1A3B6E"/>
-              </a:gs>
-            </a:gsLst>
-            <a:lin ang="9000000" scaled="0"/>
-          </a:gradFill>
-          <a:ln w="12700">
-            <a:prstDash val="solid"/>
+          <p:cNvPr id="2" name="Title 1">
+            <a:extLst>
+              <a:ext uri="{FF2B5EF4-FFF2-40B4-BE49-F238E27FC236}">
+                <a16:creationId xmlns:a16="http://schemas.microsoft.com/office/drawing/2014/main" id="{96FD8BE0-017D-7887-B802-4F1E0B65468B}"/>
+              </a:ext>
+            </a:extLst>
+          </p:cNvPr>
+          <p:cNvSpPr>
+            <a:spLocks noGrp="1"/>
+          </p:cNvSpPr>
+          <p:nvPr>
+            <p:ph type="title"/>
+          </p:nvPr>
+        </p:nvSpPr>
+        <p:spPr/>
+        <p:txBody>
+          <a:bodyPr/>
+          <a:lstStyle/>
+          <a:p>
+            <a:r>
+              <a:rPr lang="en-US" dirty="0"/>
+              <a:t>Note on </a:t>
+            </a:r>
+            <a:r>
+              <a:rPr lang="en-US" dirty="0" err="1"/>
+              <a:t>NonEmpty</a:t>
+            </a:r>
+            <a:endParaRPr lang="en-US" dirty="0"/>
+          </a:p>
+        </p:txBody>
+      </p:sp>
+      <p:sp>
+        <p:nvSpPr>
+          <p:cNvPr id="3" name="Content Placeholder 2">
+            <a:extLst>
+              <a:ext uri="{FF2B5EF4-FFF2-40B4-BE49-F238E27FC236}">
+                <a16:creationId xmlns:a16="http://schemas.microsoft.com/office/drawing/2014/main" id="{7E790187-F155-CBBC-A335-3686A4452D9F}"/>
+              </a:ext>
+            </a:extLst>
+          </p:cNvPr>
+          <p:cNvSpPr>
+            <a:spLocks noGrp="1"/>
+          </p:cNvSpPr>
+          <p:nvPr>
+            <p:ph idx="1"/>
+          </p:nvPr>
+        </p:nvSpPr>
+        <p:spPr>
+          <a:xfrm>
+            <a:off x="591182" y="2060828"/>
+            <a:ext cx="5504818" cy="2562931"/>
+          </a:xfrm>
+          <a:solidFill>
+            <a:schemeClr val="bg2">
+              <a:lumMod val="60000"/>
+              <a:lumOff val="40000"/>
+            </a:schemeClr>
+          </a:solidFill>
+        </p:spPr>
+        <p:txBody>
+          <a:bodyPr/>
+          <a:lstStyle/>
+          <a:p>
+            <a:pPr marL="0" indent="0">
+              <a:buNone/>
+            </a:pPr>
+            <a:r>
+              <a:rPr lang="en-IE" dirty="0"/>
+              <a:t>data Book = Book</a:t>
+            </a:r>
+          </a:p>
+          <a:p>
+            <a:pPr marL="0" indent="0">
+              <a:buNone/>
+            </a:pPr>
+            <a:r>
+              <a:rPr lang="en-IE" dirty="0"/>
+              <a:t>     { </a:t>
+            </a:r>
+            <a:r>
+              <a:rPr lang="en-IE" dirty="0" err="1"/>
+              <a:t>bookIsbn</a:t>
+            </a:r>
+            <a:r>
+              <a:rPr lang="en-IE" dirty="0"/>
+              <a:t> :: ISBN</a:t>
+            </a:r>
+          </a:p>
+          <a:p>
+            <a:pPr marL="0" indent="0">
+              <a:buNone/>
+            </a:pPr>
+            <a:r>
+              <a:rPr lang="en-IE" dirty="0"/>
+              <a:t>       , </a:t>
+            </a:r>
+            <a:r>
+              <a:rPr lang="en-IE" dirty="0" err="1"/>
+              <a:t>bookTitle</a:t>
+            </a:r>
+            <a:r>
+              <a:rPr lang="en-IE" dirty="0"/>
+              <a:t> :: Text</a:t>
+            </a:r>
+          </a:p>
+          <a:p>
+            <a:pPr marL="0" indent="0">
+              <a:buNone/>
+            </a:pPr>
+            <a:r>
+              <a:rPr lang="en-IE" dirty="0"/>
+              <a:t>       , </a:t>
+            </a:r>
+            <a:r>
+              <a:rPr lang="en-IE" dirty="0" err="1"/>
+              <a:t>bookSubtitle</a:t>
+            </a:r>
+            <a:r>
+              <a:rPr lang="en-IE" dirty="0"/>
+              <a:t> :: Maybe Text</a:t>
+            </a:r>
+          </a:p>
+          <a:p>
+            <a:pPr marL="0" indent="0">
+              <a:buNone/>
+            </a:pPr>
+            <a:r>
+              <a:rPr lang="en-IE" dirty="0"/>
+              <a:t>       , </a:t>
+            </a:r>
+            <a:r>
+              <a:rPr lang="en-IE" dirty="0" err="1"/>
+              <a:t>bookAuthors</a:t>
+            </a:r>
+            <a:r>
+              <a:rPr lang="en-IE" dirty="0"/>
+              <a:t> :: </a:t>
+            </a:r>
+            <a:r>
+              <a:rPr lang="en-IE" dirty="0" err="1"/>
+              <a:t>NonEmpty</a:t>
+            </a:r>
+            <a:r>
+              <a:rPr lang="en-IE" dirty="0"/>
+              <a:t> Author</a:t>
+            </a:r>
+          </a:p>
+          <a:p>
+            <a:pPr marL="0" indent="0">
+              <a:buNone/>
+            </a:pPr>
+            <a:r>
+              <a:rPr lang="en-IE" dirty="0"/>
+              <a:t>      , </a:t>
+            </a:r>
+            <a:r>
+              <a:rPr lang="en-IE" dirty="0" err="1"/>
+              <a:t>bookYear</a:t>
+            </a:r>
+            <a:r>
+              <a:rPr lang="en-IE" dirty="0"/>
+              <a:t> :: Int</a:t>
+            </a:r>
+          </a:p>
+          <a:p>
+            <a:pPr marL="0" indent="0">
+              <a:buNone/>
+            </a:pPr>
+            <a:r>
+              <a:rPr lang="en-IE" dirty="0"/>
+              <a:t>     } deriving (Show, </a:t>
+            </a:r>
+            <a:r>
+              <a:rPr lang="en-IE" dirty="0" err="1"/>
+              <a:t>Eq</a:t>
+            </a:r>
+            <a:r>
+              <a:rPr lang="en-IE" dirty="0"/>
+              <a:t>, Generic)</a:t>
+            </a:r>
+          </a:p>
+          <a:p>
+            <a:endParaRPr lang="en-US" dirty="0"/>
+          </a:p>
+        </p:txBody>
+      </p:sp>
+      <p:sp>
+        <p:nvSpPr>
+          <p:cNvPr id="4" name="Rectangle 1">
+            <a:extLst>
+              <a:ext uri="{FF2B5EF4-FFF2-40B4-BE49-F238E27FC236}">
+                <a16:creationId xmlns:a16="http://schemas.microsoft.com/office/drawing/2014/main" id="{5C2ABFDE-D8F3-E94D-3DC0-33003D46FDC5}"/>
+              </a:ext>
+            </a:extLst>
+          </p:cNvPr>
+          <p:cNvSpPr>
+            <a:spLocks noChangeArrowheads="1"/>
+          </p:cNvSpPr>
+          <p:nvPr/>
+        </p:nvSpPr>
+        <p:spPr bwMode="auto">
+          <a:xfrm>
+            <a:off x="323762" y="4842931"/>
+            <a:ext cx="9081332" cy="830997"/>
+          </a:xfrm>
+          <a:prstGeom prst="rect">
+            <a:avLst/>
+          </a:prstGeom>
+          <a:noFill/>
+          <a:ln>
+            <a:noFill/>
           </a:ln>
-        </p:spPr>
-        <p:txBody>
-          <a:bodyPr/>
-          <a:lstStyle/>
-          <a:p>
-            <a:pPr defTabSz="609585"/>
-            <a:endParaRPr lang="en-US" sz="2400">
-              <a:solidFill>
-                <a:prstClr val="white"/>
-              </a:solidFill>
-              <a:latin typeface="Trebuchet MS" panose="020B0603020202020204"/>
-            </a:endParaRPr>
-          </a:p>
-        </p:txBody>
-      </p:sp>
-      <p:sp>
-        <p:nvSpPr>
-          <p:cNvPr id="3" name="Shape 1"/>
-          <p:cNvSpPr/>
-          <p:nvPr/>
-        </p:nvSpPr>
-        <p:spPr>
-          <a:xfrm>
-            <a:off x="0" y="0"/>
-            <a:ext cx="11155680" cy="877824"/>
+          <a:effectLst/>
+          <a:extLst>
+            <a:ext uri="{909E8E84-426E-40DD-AFC4-6F175D3DCCD1}">
+              <a14:hiddenFill xmlns:a14="http://schemas.microsoft.com/office/drawing/2010/main">
+                <a:solidFill>
+                  <a:schemeClr val="accent1"/>
+                </a:solidFill>
+              </a14:hiddenFill>
+            </a:ext>
+            <a:ext uri="{91240B29-F687-4F45-9708-019B960494DF}">
+              <a14:hiddenLine xmlns:a14="http://schemas.microsoft.com/office/drawing/2010/main" w="9525">
+                <a:solidFill>
+                  <a:schemeClr val="tx1"/>
+                </a:solidFill>
+                <a:miter lim="800000"/>
+                <a:headEnd/>
+                <a:tailEnd/>
+              </a14:hiddenLine>
+            </a:ext>
+            <a:ext uri="{AF507438-7753-43E0-B8FC-AC1667EBCBE1}">
+              <a14:hiddenEffects xmlns:a14="http://schemas.microsoft.com/office/drawing/2010/main">
+                <a:effectLst>
+                  <a:outerShdw dist="35921" dir="2700000" algn="ctr" rotWithShape="0">
+                    <a:schemeClr val="bg2"/>
+                  </a:outerShdw>
+                </a:effectLst>
+              </a14:hiddenEffects>
+            </a:ext>
+          </a:extLst>
+        </p:spPr>
+        <p:txBody>
+          <a:bodyPr vert="horz" wrap="none" lIns="91440" tIns="45720" rIns="91440" bIns="45720" numCol="1" anchor="ctr" anchorCtr="0" compatLnSpc="1">
+            <a:prstTxWarp prst="textNoShape">
+              <a:avLst/>
+            </a:prstTxWarp>
+            <a:spAutoFit/>
+          </a:bodyPr>
+          <a:lstStyle/>
+          <a:p>
+            <a:pPr marL="0" marR="0" lvl="0" indent="0" algn="l" defTabSz="914400" rtl="0" eaLnBrk="0" fontAlgn="base" latinLnBrk="0" hangingPunct="0">
+              <a:lnSpc>
+                <a:spcPct val="100000"/>
+              </a:lnSpc>
+              <a:spcBef>
+                <a:spcPct val="0"/>
+              </a:spcBef>
+              <a:spcAft>
+                <a:spcPct val="0"/>
+              </a:spcAft>
+              <a:buClrTx/>
+              <a:buSzTx/>
+              <a:buFontTx/>
+              <a:buNone/>
+              <a:tabLst/>
+            </a:pPr>
+            <a:r>
+              <a:rPr kumimoji="0" lang="en-US" altLang="en-US" sz="2400" b="0" i="0" u="none" strike="noStrike" cap="none" normalizeH="0" baseline="0" dirty="0" err="1">
+                <a:ln>
+                  <a:noFill/>
+                </a:ln>
+                <a:solidFill>
+                  <a:schemeClr val="tx1"/>
+                </a:solidFill>
+                <a:effectLst/>
+              </a:rPr>
+              <a:t>NonEmpty</a:t>
+            </a:r>
+            <a:r>
+              <a:rPr kumimoji="0" lang="en-US" altLang="en-US" sz="2400" b="0" i="0" u="none" strike="noStrike" cap="none" normalizeH="0" baseline="0" dirty="0">
+                <a:ln>
+                  <a:noFill/>
+                </a:ln>
+                <a:solidFill>
+                  <a:schemeClr val="tx1"/>
+                </a:solidFill>
+                <a:effectLst/>
+              </a:rPr>
+              <a:t> a is a list that is </a:t>
+            </a:r>
+            <a:r>
+              <a:rPr kumimoji="0" lang="en-US" altLang="en-US" sz="2400" b="0" i="1" u="none" strike="noStrike" cap="none" normalizeH="0" baseline="0" dirty="0">
+                <a:ln>
+                  <a:noFill/>
+                </a:ln>
+                <a:solidFill>
+                  <a:schemeClr val="tx1"/>
+                </a:solidFill>
+                <a:effectLst/>
+              </a:rPr>
+              <a:t>guaranteed at compile time</a:t>
+            </a:r>
+            <a:r>
+              <a:rPr kumimoji="0" lang="en-US" altLang="en-US" sz="2400" b="0" i="0" u="none" strike="noStrike" cap="none" normalizeH="0" baseline="0" dirty="0">
+                <a:ln>
+                  <a:noFill/>
+                </a:ln>
+                <a:solidFill>
+                  <a:schemeClr val="tx1"/>
+                </a:solidFill>
+                <a:effectLst/>
+              </a:rPr>
+              <a:t> to have </a:t>
+            </a:r>
+          </a:p>
+          <a:p>
+            <a:pPr marL="0" marR="0" lvl="0" indent="0" algn="l" defTabSz="914400" rtl="0" eaLnBrk="0" fontAlgn="base" latinLnBrk="0" hangingPunct="0">
+              <a:lnSpc>
+                <a:spcPct val="100000"/>
+              </a:lnSpc>
+              <a:spcBef>
+                <a:spcPct val="0"/>
+              </a:spcBef>
+              <a:spcAft>
+                <a:spcPct val="0"/>
+              </a:spcAft>
+              <a:buClrTx/>
+              <a:buSzTx/>
+              <a:buFontTx/>
+              <a:buNone/>
+              <a:tabLst/>
+            </a:pPr>
+            <a:r>
+              <a:rPr kumimoji="0" lang="en-US" altLang="en-US" sz="2400" b="0" i="0" u="none" strike="noStrike" cap="none" normalizeH="0" baseline="0" dirty="0">
+                <a:ln>
+                  <a:noFill/>
+                </a:ln>
+                <a:solidFill>
+                  <a:schemeClr val="tx1"/>
+                </a:solidFill>
+                <a:effectLst/>
+              </a:rPr>
+              <a:t>at least one element. Its definition is essentially:</a:t>
+            </a:r>
+          </a:p>
+        </p:txBody>
+      </p:sp>
+      <p:sp>
+        <p:nvSpPr>
+          <p:cNvPr id="6" name="TextBox 5">
+            <a:extLst>
+              <a:ext uri="{FF2B5EF4-FFF2-40B4-BE49-F238E27FC236}">
+                <a16:creationId xmlns:a16="http://schemas.microsoft.com/office/drawing/2014/main" id="{3D963352-86C5-55DC-94FD-CF639B26C400}"/>
+              </a:ext>
+            </a:extLst>
+          </p:cNvPr>
+          <p:cNvSpPr txBox="1"/>
+          <p:nvPr/>
+        </p:nvSpPr>
+        <p:spPr>
+          <a:xfrm>
+            <a:off x="591182" y="6010358"/>
+            <a:ext cx="7147582" cy="738664"/>
           </a:xfrm>
           <a:prstGeom prst="rect">
             <a:avLst/>
           </a:prstGeom>
           <a:solidFill>
-            <a:srgbClr val="1A1A2E"/>
+            <a:schemeClr val="bg2">
+              <a:lumMod val="60000"/>
+              <a:lumOff val="40000"/>
+            </a:schemeClr>
           </a:solidFill>
-          <a:ln w="12700">
-            <a:solidFill>
-              <a:srgbClr val="1A1A2E"/>
-            </a:solidFill>
-            <a:prstDash val="solid"/>
-          </a:ln>
-        </p:spPr>
-        <p:txBody>
-          <a:bodyPr/>
-          <a:lstStyle/>
-          <a:p>
-            <a:pPr defTabSz="609585"/>
-            <a:endParaRPr lang="en-US" sz="2400">
-              <a:solidFill>
-                <a:prstClr val="white"/>
-              </a:solidFill>
-              <a:latin typeface="Trebuchet MS" panose="020B0603020202020204"/>
-            </a:endParaRPr>
-          </a:p>
-        </p:txBody>
-      </p:sp>
-      <p:sp>
-        <p:nvSpPr>
-          <p:cNvPr id="4" name="Text 2"/>
-          <p:cNvSpPr/>
-          <p:nvPr/>
-        </p:nvSpPr>
-        <p:spPr>
-          <a:xfrm>
-            <a:off x="487680" y="0"/>
-            <a:ext cx="10607040" cy="877824"/>
-          </a:xfrm>
-          <a:prstGeom prst="rect">
-            <a:avLst/>
-          </a:prstGeom>
-          <a:noFill/>
-          <a:ln/>
-        </p:spPr>
-        <p:txBody>
-          <a:bodyPr wrap="square" lIns="0" tIns="0" rIns="0" bIns="0" rtlCol="0" anchor="ctr"/>
-          <a:lstStyle/>
-          <a:p>
-            <a:pPr defTabSz="609585"/>
-            <a:r>
-              <a:rPr lang="en-US" sz="2933" dirty="0">
-                <a:solidFill>
-                  <a:srgbClr val="FFFFFF"/>
-                </a:solidFill>
-                <a:latin typeface="Trebuchet MS" pitchFamily="34" charset="0"/>
-                <a:ea typeface="Trebuchet MS" pitchFamily="34" charset="-122"/>
-                <a:cs typeface="Trebuchet MS" pitchFamily="34" charset="-120"/>
-              </a:rPr>
-              <a:t>Wiring It All Together</a:t>
-            </a:r>
-            <a:endParaRPr lang="en-US" sz="2933" dirty="0">
-              <a:solidFill>
-                <a:prstClr val="white"/>
-              </a:solidFill>
-              <a:latin typeface="Trebuchet MS" panose="020B0603020202020204"/>
-            </a:endParaRPr>
-          </a:p>
-        </p:txBody>
-      </p:sp>
-      <p:sp>
-        <p:nvSpPr>
-          <p:cNvPr id="5" name="Shape 3"/>
-          <p:cNvSpPr/>
-          <p:nvPr/>
-        </p:nvSpPr>
-        <p:spPr>
-          <a:xfrm>
-            <a:off x="11155680" y="0"/>
-            <a:ext cx="1036320" cy="707136"/>
-          </a:xfrm>
-          <a:prstGeom prst="rect">
-            <a:avLst/>
-          </a:prstGeom>
-          <a:solidFill>
-            <a:srgbClr val="39CDE7"/>
-          </a:solidFill>
-          <a:ln w="12700">
-            <a:solidFill>
-              <a:srgbClr val="39CDE7"/>
-            </a:solidFill>
-            <a:prstDash val="solid"/>
-          </a:ln>
-        </p:spPr>
-        <p:txBody>
-          <a:bodyPr/>
-          <a:lstStyle/>
-          <a:p>
-            <a:pPr defTabSz="609585"/>
-            <a:endParaRPr lang="en-US" sz="2400">
-              <a:solidFill>
-                <a:prstClr val="white"/>
-              </a:solidFill>
-              <a:latin typeface="Trebuchet MS" panose="020B0603020202020204"/>
-            </a:endParaRPr>
-          </a:p>
-        </p:txBody>
-      </p:sp>
-      <p:sp>
-        <p:nvSpPr>
-          <p:cNvPr id="6" name="Text 4"/>
-          <p:cNvSpPr/>
-          <p:nvPr/>
-        </p:nvSpPr>
-        <p:spPr>
-          <a:xfrm>
-            <a:off x="11155680" y="0"/>
-            <a:ext cx="1036320" cy="707136"/>
-          </a:xfrm>
-          <a:prstGeom prst="rect">
-            <a:avLst/>
-          </a:prstGeom>
-          <a:noFill/>
-          <a:ln/>
-        </p:spPr>
-        <p:txBody>
-          <a:bodyPr wrap="square" lIns="0" tIns="0" rIns="0" bIns="0" rtlCol="0" anchor="ctr"/>
-          <a:lstStyle/>
-          <a:p>
-            <a:pPr algn="ctr" defTabSz="609585"/>
-            <a:r>
-              <a:rPr lang="en-US" sz="2133" b="1" dirty="0">
-                <a:solidFill>
-                  <a:srgbClr val="1A1A2E"/>
-                </a:solidFill>
-                <a:latin typeface="Trebuchet MS" pitchFamily="34" charset="0"/>
-                <a:ea typeface="Trebuchet MS" pitchFamily="34" charset="-122"/>
-                <a:cs typeface="Trebuchet MS" pitchFamily="34" charset="-120"/>
-              </a:rPr>
-              <a:t>9</a:t>
-            </a:r>
-            <a:endParaRPr lang="en-US" sz="2133" dirty="0">
-              <a:solidFill>
-                <a:prstClr val="white"/>
-              </a:solidFill>
-              <a:latin typeface="Trebuchet MS" panose="020B0603020202020204"/>
-            </a:endParaRPr>
-          </a:p>
-        </p:txBody>
-      </p:sp>
-      <p:sp>
-        <p:nvSpPr>
-          <p:cNvPr id="7" name="Shape 5"/>
-          <p:cNvSpPr/>
-          <p:nvPr/>
-        </p:nvSpPr>
-        <p:spPr>
-          <a:xfrm>
-            <a:off x="487680" y="1036320"/>
-            <a:ext cx="7071360" cy="3243072"/>
-          </a:xfrm>
-          <a:prstGeom prst="rect">
-            <a:avLst/>
-          </a:prstGeom>
-          <a:solidFill>
-            <a:srgbClr val="0D1B2A"/>
-          </a:solidFill>
-          <a:ln w="12700">
-            <a:solidFill>
-              <a:srgbClr val="39CDE7"/>
-            </a:solidFill>
-            <a:prstDash val="solid"/>
-          </a:ln>
-        </p:spPr>
-        <p:txBody>
-          <a:bodyPr/>
-          <a:lstStyle/>
-          <a:p>
-            <a:pPr defTabSz="609585"/>
-            <a:endParaRPr lang="en-US" sz="2400">
-              <a:solidFill>
-                <a:prstClr val="white"/>
-              </a:solidFill>
-              <a:latin typeface="Trebuchet MS" panose="020B0603020202020204"/>
-            </a:endParaRPr>
-          </a:p>
-        </p:txBody>
-      </p:sp>
-      <p:sp>
-        <p:nvSpPr>
-          <p:cNvPr id="8" name="Text 6"/>
-          <p:cNvSpPr/>
-          <p:nvPr/>
-        </p:nvSpPr>
-        <p:spPr>
-          <a:xfrm>
-            <a:off x="6681216" y="1085088"/>
-            <a:ext cx="792480" cy="219456"/>
-          </a:xfrm>
-          <a:prstGeom prst="rect">
-            <a:avLst/>
-          </a:prstGeom>
-          <a:noFill/>
-          <a:ln/>
-        </p:spPr>
-        <p:txBody>
-          <a:bodyPr wrap="square" lIns="0" tIns="0" rIns="0" bIns="0" rtlCol="0" anchor="ctr"/>
-          <a:lstStyle/>
-          <a:p>
-            <a:pPr algn="r" defTabSz="609585"/>
-            <a:r>
-              <a:rPr lang="en-US" sz="933" i="1" dirty="0">
-                <a:solidFill>
-                  <a:srgbClr val="39CDE7"/>
-                </a:solidFill>
-                <a:latin typeface="Trebuchet MS" panose="020B0603020202020204"/>
-              </a:rPr>
-              <a:t>Haskell</a:t>
-            </a:r>
-            <a:endParaRPr lang="en-US" sz="933" dirty="0">
-              <a:solidFill>
-                <a:prstClr val="white"/>
-              </a:solidFill>
-              <a:latin typeface="Trebuchet MS" panose="020B0603020202020204"/>
-            </a:endParaRPr>
-          </a:p>
-        </p:txBody>
-      </p:sp>
-      <p:sp>
-        <p:nvSpPr>
-          <p:cNvPr id="9" name="Text 7"/>
-          <p:cNvSpPr/>
-          <p:nvPr/>
-        </p:nvSpPr>
-        <p:spPr>
-          <a:xfrm>
-            <a:off x="658368" y="1304544"/>
-            <a:ext cx="6729984" cy="3755136"/>
-          </a:xfrm>
-          <a:prstGeom prst="rect">
-            <a:avLst/>
-          </a:prstGeom>
-          <a:noFill/>
-          <a:ln/>
-        </p:spPr>
-        <p:txBody>
-          <a:bodyPr wrap="square" lIns="0" tIns="0" rIns="0" bIns="0" rtlCol="0" anchor="t"/>
-          <a:lstStyle/>
-          <a:p>
-            <a:pPr defTabSz="609585"/>
-            <a:r>
-              <a:rPr lang="en-US" sz="1267" dirty="0">
-                <a:solidFill>
-                  <a:srgbClr val="E7E6E6"/>
-                </a:solidFill>
-                <a:latin typeface="Consolas" pitchFamily="34" charset="0"/>
-                <a:ea typeface="Consolas" pitchFamily="34" charset="-122"/>
-                <a:cs typeface="Consolas" pitchFamily="34" charset="-120"/>
-              </a:rPr>
-              <a:t>module Main where</a:t>
-            </a:r>
-            <a:endParaRPr lang="en-US" sz="1267" dirty="0">
-              <a:solidFill>
-                <a:prstClr val="white"/>
-              </a:solidFill>
-              <a:latin typeface="Trebuchet MS" panose="020B0603020202020204"/>
-            </a:endParaRPr>
-          </a:p>
-          <a:p>
-            <a:pPr defTabSz="609585"/>
-            <a:endParaRPr lang="en-US" sz="1267" dirty="0">
-              <a:solidFill>
-                <a:prstClr val="white"/>
-              </a:solidFill>
-              <a:latin typeface="Trebuchet MS" panose="020B0603020202020204"/>
-            </a:endParaRPr>
-          </a:p>
-          <a:p>
-            <a:pPr defTabSz="609585"/>
-            <a:r>
-              <a:rPr lang="en-US" sz="1267" dirty="0">
-                <a:solidFill>
-                  <a:srgbClr val="E7E6E6"/>
-                </a:solidFill>
-                <a:latin typeface="Consolas" pitchFamily="34" charset="0"/>
-                <a:ea typeface="Consolas" pitchFamily="34" charset="-122"/>
-                <a:cs typeface="Consolas" pitchFamily="34" charset="-120"/>
-              </a:rPr>
-              <a:t>import Text.XML          (readFile, def)</a:t>
-            </a:r>
-            <a:endParaRPr lang="en-US" sz="1267" dirty="0">
-              <a:solidFill>
-                <a:prstClr val="white"/>
-              </a:solidFill>
-              <a:latin typeface="Trebuchet MS" panose="020B0603020202020204"/>
-            </a:endParaRPr>
-          </a:p>
-          <a:p>
-            <a:pPr defTabSz="609585"/>
-            <a:r>
-              <a:rPr lang="en-US" sz="1267" dirty="0">
-                <a:solidFill>
-                  <a:srgbClr val="E7E6E6"/>
-                </a:solidFill>
-                <a:latin typeface="Consolas" pitchFamily="34" charset="0"/>
-                <a:ea typeface="Consolas" pitchFamily="34" charset="-122"/>
-                <a:cs typeface="Consolas" pitchFamily="34" charset="-120"/>
-              </a:rPr>
-              <a:t>import Text.XML.Cursor   (fromDocument)</a:t>
-            </a:r>
-            <a:endParaRPr lang="en-US" sz="1267" dirty="0">
-              <a:solidFill>
-                <a:prstClr val="white"/>
-              </a:solidFill>
-              <a:latin typeface="Trebuchet MS" panose="020B0603020202020204"/>
-            </a:endParaRPr>
-          </a:p>
-          <a:p>
-            <a:pPr defTabSz="609585"/>
-            <a:r>
-              <a:rPr lang="en-US" sz="1267" dirty="0">
-                <a:solidFill>
-                  <a:srgbClr val="E7E6E6"/>
-                </a:solidFill>
-                <a:latin typeface="Consolas" pitchFamily="34" charset="0"/>
-                <a:ea typeface="Consolas" pitchFamily="34" charset="-122"/>
-                <a:cs typeface="Consolas" pitchFamily="34" charset="-120"/>
-              </a:rPr>
-              <a:t>import Prelude hiding    (readFile)</a:t>
-            </a:r>
-            <a:endParaRPr lang="en-US" sz="1267" dirty="0">
-              <a:solidFill>
-                <a:prstClr val="white"/>
-              </a:solidFill>
-              <a:latin typeface="Trebuchet MS" panose="020B0603020202020204"/>
-            </a:endParaRPr>
-          </a:p>
-          <a:p>
-            <a:pPr defTabSz="609585"/>
-            <a:r>
-              <a:rPr lang="en-US" sz="1267" dirty="0">
-                <a:solidFill>
-                  <a:srgbClr val="E7E6E6"/>
-                </a:solidFill>
-                <a:latin typeface="Consolas" pitchFamily="34" charset="0"/>
-                <a:ea typeface="Consolas" pitchFamily="34" charset="-122"/>
-                <a:cs typeface="Consolas" pitchFamily="34" charset="-120"/>
-              </a:rPr>
-              <a:t>import System.Environment (getArgs)</a:t>
-            </a:r>
-            <a:endParaRPr lang="en-US" sz="1267" dirty="0">
-              <a:solidFill>
-                <a:prstClr val="white"/>
-              </a:solidFill>
-              <a:latin typeface="Trebuchet MS" panose="020B0603020202020204"/>
-            </a:endParaRPr>
-          </a:p>
-          <a:p>
-            <a:pPr defTabSz="609585"/>
-            <a:endParaRPr lang="en-US" sz="1267" dirty="0">
-              <a:solidFill>
-                <a:prstClr val="white"/>
-              </a:solidFill>
-              <a:latin typeface="Trebuchet MS" panose="020B0603020202020204"/>
-            </a:endParaRPr>
-          </a:p>
-          <a:p>
-            <a:pPr defTabSz="609585"/>
-            <a:r>
-              <a:rPr lang="en-US" sz="1267" dirty="0">
-                <a:solidFill>
-                  <a:srgbClr val="E7E6E6"/>
-                </a:solidFill>
-                <a:latin typeface="Consolas" pitchFamily="34" charset="0"/>
-                <a:ea typeface="Consolas" pitchFamily="34" charset="-122"/>
-                <a:cs typeface="Consolas" pitchFamily="34" charset="-120"/>
-              </a:rPr>
-              <a:t>main :: IO ()</a:t>
-            </a:r>
-            <a:endParaRPr lang="en-US" sz="1267" dirty="0">
-              <a:solidFill>
-                <a:prstClr val="white"/>
-              </a:solidFill>
-              <a:latin typeface="Trebuchet MS" panose="020B0603020202020204"/>
-            </a:endParaRPr>
-          </a:p>
-          <a:p>
-            <a:pPr defTabSz="609585"/>
-            <a:r>
-              <a:rPr lang="en-US" sz="1267" dirty="0">
-                <a:solidFill>
-                  <a:srgbClr val="E7E6E6"/>
-                </a:solidFill>
-                <a:latin typeface="Consolas" pitchFamily="34" charset="0"/>
-                <a:ea typeface="Consolas" pitchFamily="34" charset="-122"/>
-                <a:cs typeface="Consolas" pitchFamily="34" charset="-120"/>
-              </a:rPr>
-              <a:t>main = do</a:t>
-            </a:r>
-            <a:endParaRPr lang="en-US" sz="1267" dirty="0">
-              <a:solidFill>
-                <a:prstClr val="white"/>
-              </a:solidFill>
-              <a:latin typeface="Trebuchet MS" panose="020B0603020202020204"/>
-            </a:endParaRPr>
-          </a:p>
-          <a:p>
-            <a:pPr defTabSz="609585"/>
-            <a:r>
-              <a:rPr lang="en-US" sz="1267" dirty="0">
-                <a:solidFill>
-                  <a:srgbClr val="E7E6E6"/>
-                </a:solidFill>
-                <a:latin typeface="Consolas" pitchFamily="34" charset="0"/>
-                <a:ea typeface="Consolas" pitchFamily="34" charset="-122"/>
-                <a:cs typeface="Consolas" pitchFamily="34" charset="-120"/>
-              </a:rPr>
-              <a:t>      doc   &lt;- </a:t>
-            </a:r>
-            <a:r>
-              <a:rPr lang="en-US" sz="1267" dirty="0" err="1">
-                <a:solidFill>
-                  <a:srgbClr val="E7E6E6"/>
-                </a:solidFill>
-                <a:latin typeface="Consolas" pitchFamily="34" charset="0"/>
-                <a:ea typeface="Consolas" pitchFamily="34" charset="-122"/>
-                <a:cs typeface="Consolas" pitchFamily="34" charset="-120"/>
-              </a:rPr>
-              <a:t>Text.XML.readFile</a:t>
-            </a:r>
-            <a:r>
-              <a:rPr lang="en-US" sz="1267" dirty="0">
-                <a:solidFill>
-                  <a:srgbClr val="E7E6E6"/>
-                </a:solidFill>
-                <a:latin typeface="Consolas" pitchFamily="34" charset="0"/>
-                <a:ea typeface="Consolas" pitchFamily="34" charset="-122"/>
-                <a:cs typeface="Consolas" pitchFamily="34" charset="-120"/>
-              </a:rPr>
-              <a:t> def “</a:t>
-            </a:r>
-            <a:r>
-              <a:rPr lang="en-US" sz="1267" dirty="0" err="1">
-                <a:solidFill>
-                  <a:srgbClr val="E7E6E6"/>
-                </a:solidFill>
-                <a:latin typeface="Consolas" pitchFamily="34" charset="0"/>
-                <a:ea typeface="Consolas" pitchFamily="34" charset="-122"/>
-                <a:cs typeface="Consolas" pitchFamily="34" charset="-120"/>
-              </a:rPr>
-              <a:t>books.xml</a:t>
-            </a:r>
-            <a:r>
-              <a:rPr lang="en-US" sz="1267" dirty="0">
-                <a:solidFill>
-                  <a:srgbClr val="E7E6E6"/>
-                </a:solidFill>
-                <a:latin typeface="Consolas" pitchFamily="34" charset="0"/>
-                <a:ea typeface="Consolas" pitchFamily="34" charset="-122"/>
-                <a:cs typeface="Consolas" pitchFamily="34" charset="-120"/>
-              </a:rPr>
-              <a:t>”</a:t>
-            </a:r>
-            <a:endParaRPr lang="en-US" sz="1267" dirty="0">
-              <a:solidFill>
-                <a:prstClr val="white"/>
-              </a:solidFill>
-              <a:latin typeface="Trebuchet MS" panose="020B0603020202020204"/>
-            </a:endParaRPr>
-          </a:p>
-          <a:p>
-            <a:pPr defTabSz="609585"/>
-            <a:r>
-              <a:rPr lang="en-US" sz="1267" dirty="0">
-                <a:solidFill>
-                  <a:srgbClr val="E7E6E6"/>
-                </a:solidFill>
-                <a:latin typeface="Consolas" pitchFamily="34" charset="0"/>
-                <a:ea typeface="Consolas" pitchFamily="34" charset="-122"/>
-                <a:cs typeface="Consolas" pitchFamily="34" charset="-120"/>
-              </a:rPr>
-              <a:t>      let books = parseCatalogue doc</a:t>
-            </a:r>
-            <a:endParaRPr lang="en-US" sz="1267" dirty="0">
-              <a:solidFill>
-                <a:prstClr val="white"/>
-              </a:solidFill>
-              <a:latin typeface="Trebuchet MS" panose="020B0603020202020204"/>
-            </a:endParaRPr>
-          </a:p>
-          <a:p>
-            <a:pPr defTabSz="609585"/>
-            <a:r>
-              <a:rPr lang="en-US" sz="1267" dirty="0">
-                <a:solidFill>
-                  <a:srgbClr val="E7E6E6"/>
-                </a:solidFill>
-                <a:latin typeface="Consolas" pitchFamily="34" charset="0"/>
-                <a:ea typeface="Consolas" pitchFamily="34" charset="-122"/>
-                <a:cs typeface="Consolas" pitchFamily="34" charset="-120"/>
-              </a:rPr>
-              <a:t>      putStrLn $ "Parsed " ++ show (length books) ++ " book(s)."</a:t>
-            </a:r>
-            <a:endParaRPr lang="en-US" sz="1267" dirty="0">
-              <a:solidFill>
-                <a:prstClr val="white"/>
-              </a:solidFill>
-              <a:latin typeface="Trebuchet MS" panose="020B0603020202020204"/>
-            </a:endParaRPr>
-          </a:p>
-          <a:p>
-            <a:pPr defTabSz="609585"/>
-            <a:r>
-              <a:rPr lang="en-US" sz="1267" dirty="0">
-                <a:solidFill>
-                  <a:srgbClr val="E7E6E6"/>
-                </a:solidFill>
-                <a:latin typeface="Consolas" pitchFamily="34" charset="0"/>
-                <a:ea typeface="Consolas" pitchFamily="34" charset="-122"/>
-                <a:cs typeface="Consolas" pitchFamily="34" charset="-120"/>
-              </a:rPr>
-              <a:t>      </a:t>
-            </a:r>
-            <a:r>
-              <a:rPr lang="en-US" sz="1267" dirty="0" err="1">
-                <a:solidFill>
-                  <a:srgbClr val="E7E6E6"/>
-                </a:solidFill>
-                <a:latin typeface="Consolas" pitchFamily="34" charset="0"/>
-                <a:ea typeface="Consolas" pitchFamily="34" charset="-122"/>
-                <a:cs typeface="Consolas" pitchFamily="34" charset="-120"/>
-              </a:rPr>
-              <a:t>writeCatalogue</a:t>
-            </a:r>
-            <a:r>
-              <a:rPr lang="en-US" sz="1267" dirty="0">
-                <a:solidFill>
-                  <a:srgbClr val="E7E6E6"/>
-                </a:solidFill>
-                <a:latin typeface="Consolas" pitchFamily="34" charset="0"/>
-                <a:ea typeface="Consolas" pitchFamily="34" charset="-122"/>
-                <a:cs typeface="Consolas" pitchFamily="34" charset="-120"/>
-              </a:rPr>
-              <a:t> books</a:t>
-            </a:r>
-            <a:endParaRPr lang="en-US" sz="1267" dirty="0">
-              <a:solidFill>
-                <a:prstClr val="white"/>
-              </a:solidFill>
-              <a:latin typeface="Trebuchet MS" panose="020B0603020202020204"/>
-            </a:endParaRPr>
-          </a:p>
-          <a:p>
-            <a:pPr defTabSz="609585"/>
-            <a:r>
-              <a:rPr lang="en-US" sz="1267" dirty="0">
-                <a:solidFill>
-                  <a:srgbClr val="E7E6E6"/>
-                </a:solidFill>
-                <a:latin typeface="Consolas" pitchFamily="34" charset="0"/>
-                <a:ea typeface="Consolas" pitchFamily="34" charset="-122"/>
-                <a:cs typeface="Consolas" pitchFamily="34" charset="-120"/>
-              </a:rPr>
-              <a:t>      putStrLn $ "Written to " ++ mdPath</a:t>
-            </a:r>
-            <a:endParaRPr lang="en-US" sz="1267" dirty="0">
-              <a:solidFill>
-                <a:prstClr val="white"/>
-              </a:solidFill>
-              <a:latin typeface="Trebuchet MS" panose="020B0603020202020204"/>
-            </a:endParaRPr>
-          </a:p>
-          <a:p>
-            <a:pPr defTabSz="609585"/>
-            <a:r>
-              <a:rPr lang="en-US" sz="1267" dirty="0">
-                <a:solidFill>
-                  <a:srgbClr val="E7E6E6"/>
-                </a:solidFill>
-                <a:latin typeface="Consolas" pitchFamily="34" charset="0"/>
-                <a:ea typeface="Consolas" pitchFamily="34" charset="-122"/>
-                <a:cs typeface="Consolas" pitchFamily="34" charset="-120"/>
-              </a:rPr>
-              <a:t>   </a:t>
-            </a:r>
-            <a:endParaRPr lang="en-US" sz="1267" dirty="0">
-              <a:solidFill>
-                <a:prstClr val="white"/>
-              </a:solidFill>
-              <a:latin typeface="Trebuchet MS" panose="020B0603020202020204"/>
-            </a:endParaRPr>
-          </a:p>
-        </p:txBody>
-      </p:sp>
-      <p:sp>
-        <p:nvSpPr>
-          <p:cNvPr id="10" name="Shape 8"/>
-          <p:cNvSpPr/>
-          <p:nvPr/>
-        </p:nvSpPr>
-        <p:spPr>
-          <a:xfrm>
-            <a:off x="7985760" y="1158240"/>
-            <a:ext cx="548640" cy="548640"/>
-          </a:xfrm>
-          <a:prstGeom prst="ellipse">
-            <a:avLst/>
-          </a:prstGeom>
-          <a:solidFill>
-            <a:srgbClr val="39CDE7"/>
-          </a:solidFill>
-          <a:ln w="12700">
-            <a:solidFill>
-              <a:srgbClr val="39CDE7"/>
-            </a:solidFill>
-            <a:prstDash val="solid"/>
-          </a:ln>
-        </p:spPr>
-        <p:txBody>
-          <a:bodyPr/>
-          <a:lstStyle/>
-          <a:p>
-            <a:pPr defTabSz="609585"/>
-            <a:endParaRPr lang="en-US" sz="2400">
-              <a:solidFill>
-                <a:prstClr val="white"/>
-              </a:solidFill>
-              <a:latin typeface="Trebuchet MS" panose="020B0603020202020204"/>
-            </a:endParaRPr>
-          </a:p>
-        </p:txBody>
-      </p:sp>
-      <p:sp>
-        <p:nvSpPr>
-          <p:cNvPr id="11" name="Text 9"/>
-          <p:cNvSpPr/>
-          <p:nvPr/>
-        </p:nvSpPr>
-        <p:spPr>
-          <a:xfrm>
-            <a:off x="7985760" y="1158240"/>
-            <a:ext cx="548640" cy="548640"/>
-          </a:xfrm>
-          <a:prstGeom prst="rect">
-            <a:avLst/>
-          </a:prstGeom>
-          <a:noFill/>
-          <a:ln/>
-        </p:spPr>
-        <p:txBody>
-          <a:bodyPr wrap="square" lIns="0" tIns="0" rIns="0" bIns="0" rtlCol="0" anchor="ctr"/>
-          <a:lstStyle/>
-          <a:p>
-            <a:pPr algn="ctr" defTabSz="609585"/>
-            <a:r>
-              <a:rPr lang="en-US" sz="2000" b="1" dirty="0">
-                <a:solidFill>
-                  <a:srgbClr val="1A1A2E"/>
-                </a:solidFill>
-                <a:latin typeface="Trebuchet MS" pitchFamily="34" charset="0"/>
-                <a:ea typeface="Trebuchet MS" pitchFamily="34" charset="-122"/>
-                <a:cs typeface="Trebuchet MS" pitchFamily="34" charset="-120"/>
-              </a:rPr>
-              <a:t>1</a:t>
-            </a:r>
-            <a:endParaRPr lang="en-US" sz="2000" dirty="0">
-              <a:solidFill>
-                <a:prstClr val="white"/>
-              </a:solidFill>
-              <a:latin typeface="Trebuchet MS" panose="020B0603020202020204"/>
-            </a:endParaRPr>
-          </a:p>
-        </p:txBody>
-      </p:sp>
-      <p:sp>
-        <p:nvSpPr>
-          <p:cNvPr id="12" name="Text 10"/>
-          <p:cNvSpPr/>
-          <p:nvPr/>
-        </p:nvSpPr>
-        <p:spPr>
-          <a:xfrm>
-            <a:off x="8656320" y="1170432"/>
-            <a:ext cx="3108960" cy="365760"/>
-          </a:xfrm>
-          <a:prstGeom prst="rect">
-            <a:avLst/>
-          </a:prstGeom>
-          <a:noFill/>
-          <a:ln/>
-        </p:spPr>
-        <p:txBody>
-          <a:bodyPr wrap="square" lIns="0" tIns="0" rIns="0" bIns="0" rtlCol="0" anchor="ctr"/>
-          <a:lstStyle/>
-          <a:p>
-            <a:pPr defTabSz="609585"/>
-            <a:r>
-              <a:rPr lang="en-US" sz="1600" b="1" dirty="0">
-                <a:solidFill>
-                  <a:srgbClr val="FFFFFF"/>
-                </a:solidFill>
-                <a:latin typeface="Trebuchet MS" pitchFamily="34" charset="0"/>
-                <a:ea typeface="Trebuchet MS" pitchFamily="34" charset="-122"/>
-                <a:cs typeface="Trebuchet MS" pitchFamily="34" charset="-120"/>
-              </a:rPr>
-              <a:t>Read XML</a:t>
-            </a:r>
-            <a:endParaRPr lang="en-US" sz="1600" dirty="0">
-              <a:solidFill>
-                <a:prstClr val="white"/>
-              </a:solidFill>
-              <a:latin typeface="Trebuchet MS" panose="020B0603020202020204"/>
-            </a:endParaRPr>
-          </a:p>
-        </p:txBody>
-      </p:sp>
-      <p:sp>
-        <p:nvSpPr>
-          <p:cNvPr id="13" name="Text 11"/>
-          <p:cNvSpPr/>
-          <p:nvPr/>
-        </p:nvSpPr>
-        <p:spPr>
-          <a:xfrm>
-            <a:off x="8656320" y="1548384"/>
-            <a:ext cx="3108960" cy="792480"/>
-          </a:xfrm>
-          <a:prstGeom prst="rect">
-            <a:avLst/>
-          </a:prstGeom>
-          <a:noFill/>
-          <a:ln/>
-        </p:spPr>
-        <p:txBody>
-          <a:bodyPr wrap="square" lIns="0" tIns="0" rIns="0" bIns="0" rtlCol="0" anchor="t"/>
-          <a:lstStyle/>
-          <a:p>
-            <a:pPr defTabSz="609585"/>
-            <a:r>
-              <a:rPr lang="en-US" sz="1333" dirty="0">
-                <a:solidFill>
-                  <a:srgbClr val="E7E6E6"/>
-                </a:solidFill>
-                <a:latin typeface="Trebuchet MS" pitchFamily="34" charset="0"/>
-                <a:ea typeface="Trebuchet MS" pitchFamily="34" charset="-122"/>
-                <a:cs typeface="Trebuchet MS" pitchFamily="34" charset="-120"/>
-              </a:rPr>
-              <a:t>readFile parses the file into a Document, throwing on malformed XML.</a:t>
-            </a:r>
-            <a:endParaRPr lang="en-US" sz="1333" dirty="0">
-              <a:solidFill>
-                <a:prstClr val="white"/>
-              </a:solidFill>
-              <a:latin typeface="Trebuchet MS" panose="020B0603020202020204"/>
-            </a:endParaRPr>
-          </a:p>
-        </p:txBody>
-      </p:sp>
-      <p:sp>
-        <p:nvSpPr>
-          <p:cNvPr id="14" name="Shape 12"/>
-          <p:cNvSpPr/>
-          <p:nvPr/>
-        </p:nvSpPr>
-        <p:spPr>
-          <a:xfrm>
-            <a:off x="8229600" y="1743456"/>
-            <a:ext cx="60960" cy="670560"/>
-          </a:xfrm>
-          <a:prstGeom prst="rect">
-            <a:avLst/>
-          </a:prstGeom>
-          <a:solidFill>
-            <a:srgbClr val="39CDE7"/>
-          </a:solidFill>
-          <a:ln w="12700">
-            <a:solidFill>
-              <a:srgbClr val="39CDE7"/>
-            </a:solidFill>
-            <a:prstDash val="solid"/>
-          </a:ln>
-        </p:spPr>
-        <p:txBody>
-          <a:bodyPr/>
-          <a:lstStyle/>
-          <a:p>
-            <a:pPr defTabSz="609585"/>
-            <a:endParaRPr lang="en-US" sz="2400">
-              <a:solidFill>
-                <a:prstClr val="white"/>
-              </a:solidFill>
-              <a:latin typeface="Trebuchet MS" panose="020B0603020202020204"/>
-            </a:endParaRPr>
-          </a:p>
-        </p:txBody>
-      </p:sp>
-      <p:sp>
-        <p:nvSpPr>
-          <p:cNvPr id="15" name="Shape 13"/>
-          <p:cNvSpPr/>
-          <p:nvPr/>
-        </p:nvSpPr>
-        <p:spPr>
-          <a:xfrm>
-            <a:off x="7985760" y="2523744"/>
-            <a:ext cx="548640" cy="548640"/>
-          </a:xfrm>
-          <a:prstGeom prst="ellipse">
-            <a:avLst/>
-          </a:prstGeom>
-          <a:solidFill>
-            <a:srgbClr val="39CDE7"/>
-          </a:solidFill>
-          <a:ln w="12700">
-            <a:solidFill>
-              <a:srgbClr val="39CDE7"/>
-            </a:solidFill>
-            <a:prstDash val="solid"/>
-          </a:ln>
-        </p:spPr>
-        <p:txBody>
-          <a:bodyPr/>
-          <a:lstStyle/>
-          <a:p>
-            <a:pPr defTabSz="609585"/>
-            <a:endParaRPr lang="en-US" sz="2400">
-              <a:solidFill>
-                <a:prstClr val="white"/>
-              </a:solidFill>
-              <a:latin typeface="Trebuchet MS" panose="020B0603020202020204"/>
-            </a:endParaRPr>
-          </a:p>
-        </p:txBody>
-      </p:sp>
-      <p:sp>
-        <p:nvSpPr>
-          <p:cNvPr id="16" name="Text 14"/>
-          <p:cNvSpPr/>
-          <p:nvPr/>
-        </p:nvSpPr>
-        <p:spPr>
-          <a:xfrm>
-            <a:off x="7985760" y="2523744"/>
-            <a:ext cx="548640" cy="548640"/>
-          </a:xfrm>
-          <a:prstGeom prst="rect">
-            <a:avLst/>
-          </a:prstGeom>
-          <a:noFill/>
-          <a:ln/>
-        </p:spPr>
-        <p:txBody>
-          <a:bodyPr wrap="square" lIns="0" tIns="0" rIns="0" bIns="0" rtlCol="0" anchor="ctr"/>
-          <a:lstStyle/>
-          <a:p>
-            <a:pPr algn="ctr" defTabSz="609585"/>
-            <a:r>
-              <a:rPr lang="en-US" sz="2000" b="1" dirty="0">
-                <a:solidFill>
-                  <a:srgbClr val="1A1A2E"/>
-                </a:solidFill>
-                <a:latin typeface="Trebuchet MS" pitchFamily="34" charset="0"/>
-                <a:ea typeface="Trebuchet MS" pitchFamily="34" charset="-122"/>
-                <a:cs typeface="Trebuchet MS" pitchFamily="34" charset="-120"/>
-              </a:rPr>
-              <a:t>2</a:t>
-            </a:r>
-            <a:endParaRPr lang="en-US" sz="2000" dirty="0">
-              <a:solidFill>
-                <a:prstClr val="white"/>
-              </a:solidFill>
-              <a:latin typeface="Trebuchet MS" panose="020B0603020202020204"/>
-            </a:endParaRPr>
-          </a:p>
-        </p:txBody>
-      </p:sp>
-      <p:sp>
-        <p:nvSpPr>
-          <p:cNvPr id="17" name="Text 15"/>
-          <p:cNvSpPr/>
-          <p:nvPr/>
-        </p:nvSpPr>
-        <p:spPr>
-          <a:xfrm>
-            <a:off x="8656320" y="2535936"/>
-            <a:ext cx="3108960" cy="365760"/>
-          </a:xfrm>
-          <a:prstGeom prst="rect">
-            <a:avLst/>
-          </a:prstGeom>
-          <a:noFill/>
-          <a:ln/>
-        </p:spPr>
-        <p:txBody>
-          <a:bodyPr wrap="square" lIns="0" tIns="0" rIns="0" bIns="0" rtlCol="0" anchor="ctr"/>
-          <a:lstStyle/>
-          <a:p>
-            <a:pPr defTabSz="609585"/>
-            <a:r>
-              <a:rPr lang="en-US" sz="1600" b="1" dirty="0">
-                <a:solidFill>
-                  <a:srgbClr val="FFFFFF"/>
-                </a:solidFill>
-                <a:latin typeface="Trebuchet MS" pitchFamily="34" charset="0"/>
-                <a:ea typeface="Trebuchet MS" pitchFamily="34" charset="-122"/>
-                <a:cs typeface="Trebuchet MS" pitchFamily="34" charset="-120"/>
-              </a:rPr>
-              <a:t>Parse</a:t>
-            </a:r>
-            <a:endParaRPr lang="en-US" sz="1600" dirty="0">
-              <a:solidFill>
-                <a:prstClr val="white"/>
-              </a:solidFill>
-              <a:latin typeface="Trebuchet MS" panose="020B0603020202020204"/>
-            </a:endParaRPr>
-          </a:p>
-        </p:txBody>
-      </p:sp>
-      <p:sp>
-        <p:nvSpPr>
-          <p:cNvPr id="18" name="Text 16"/>
-          <p:cNvSpPr/>
-          <p:nvPr/>
-        </p:nvSpPr>
-        <p:spPr>
-          <a:xfrm>
-            <a:off x="8656320" y="2913888"/>
-            <a:ext cx="3108960" cy="792480"/>
-          </a:xfrm>
-          <a:prstGeom prst="rect">
-            <a:avLst/>
-          </a:prstGeom>
-          <a:noFill/>
-          <a:ln/>
-        </p:spPr>
-        <p:txBody>
-          <a:bodyPr wrap="square" lIns="0" tIns="0" rIns="0" bIns="0" rtlCol="0" anchor="t"/>
-          <a:lstStyle/>
-          <a:p>
-            <a:pPr defTabSz="609585"/>
-            <a:r>
-              <a:rPr lang="en-US" sz="1333" dirty="0">
-                <a:solidFill>
-                  <a:srgbClr val="E7E6E6"/>
-                </a:solidFill>
-                <a:latin typeface="Trebuchet MS" pitchFamily="34" charset="0"/>
-                <a:ea typeface="Trebuchet MS" pitchFamily="34" charset="-122"/>
-                <a:cs typeface="Trebuchet MS" pitchFamily="34" charset="-120"/>
-              </a:rPr>
-              <a:t>parseCatalogue walks the cursor tree → [Book].</a:t>
-            </a:r>
-            <a:endParaRPr lang="en-US" sz="1333" dirty="0">
-              <a:solidFill>
-                <a:prstClr val="white"/>
-              </a:solidFill>
-              <a:latin typeface="Trebuchet MS" panose="020B0603020202020204"/>
-            </a:endParaRPr>
-          </a:p>
-        </p:txBody>
-      </p:sp>
-      <p:sp>
-        <p:nvSpPr>
-          <p:cNvPr id="19" name="Shape 17"/>
-          <p:cNvSpPr/>
-          <p:nvPr/>
-        </p:nvSpPr>
-        <p:spPr>
-          <a:xfrm>
-            <a:off x="8229600" y="3108960"/>
-            <a:ext cx="60960" cy="670560"/>
-          </a:xfrm>
-          <a:prstGeom prst="rect">
-            <a:avLst/>
-          </a:prstGeom>
-          <a:solidFill>
-            <a:srgbClr val="39CDE7"/>
-          </a:solidFill>
-          <a:ln w="12700">
-            <a:solidFill>
-              <a:srgbClr val="39CDE7"/>
-            </a:solidFill>
-            <a:prstDash val="solid"/>
-          </a:ln>
-        </p:spPr>
-        <p:txBody>
-          <a:bodyPr/>
-          <a:lstStyle/>
-          <a:p>
-            <a:pPr defTabSz="609585"/>
-            <a:endParaRPr lang="en-US" sz="2400">
-              <a:solidFill>
-                <a:prstClr val="white"/>
-              </a:solidFill>
-              <a:latin typeface="Trebuchet MS" panose="020B0603020202020204"/>
-            </a:endParaRPr>
-          </a:p>
-        </p:txBody>
-      </p:sp>
-      <p:sp>
-        <p:nvSpPr>
-          <p:cNvPr id="20" name="Shape 18"/>
-          <p:cNvSpPr/>
-          <p:nvPr/>
-        </p:nvSpPr>
-        <p:spPr>
-          <a:xfrm>
-            <a:off x="7985760" y="3889248"/>
-            <a:ext cx="548640" cy="548640"/>
-          </a:xfrm>
-          <a:prstGeom prst="ellipse">
-            <a:avLst/>
-          </a:prstGeom>
-          <a:solidFill>
-            <a:srgbClr val="39CDE7"/>
-          </a:solidFill>
-          <a:ln w="12700">
-            <a:solidFill>
-              <a:srgbClr val="39CDE7"/>
-            </a:solidFill>
-            <a:prstDash val="solid"/>
-          </a:ln>
-        </p:spPr>
-        <p:txBody>
-          <a:bodyPr/>
-          <a:lstStyle/>
-          <a:p>
-            <a:pPr defTabSz="609585"/>
-            <a:endParaRPr lang="en-US" sz="2400">
-              <a:solidFill>
-                <a:prstClr val="white"/>
-              </a:solidFill>
-              <a:latin typeface="Trebuchet MS" panose="020B0603020202020204"/>
-            </a:endParaRPr>
-          </a:p>
-        </p:txBody>
-      </p:sp>
-      <p:sp>
-        <p:nvSpPr>
-          <p:cNvPr id="21" name="Text 19"/>
-          <p:cNvSpPr/>
-          <p:nvPr/>
-        </p:nvSpPr>
-        <p:spPr>
-          <a:xfrm>
-            <a:off x="7985760" y="3889248"/>
-            <a:ext cx="548640" cy="548640"/>
-          </a:xfrm>
-          <a:prstGeom prst="rect">
-            <a:avLst/>
-          </a:prstGeom>
-          <a:noFill/>
-          <a:ln/>
-        </p:spPr>
-        <p:txBody>
-          <a:bodyPr wrap="square" lIns="0" tIns="0" rIns="0" bIns="0" rtlCol="0" anchor="ctr"/>
-          <a:lstStyle/>
-          <a:p>
-            <a:pPr algn="ctr" defTabSz="609585"/>
-            <a:r>
-              <a:rPr lang="en-US" sz="2000" b="1" dirty="0">
-                <a:solidFill>
-                  <a:srgbClr val="1A1A2E"/>
-                </a:solidFill>
-                <a:latin typeface="Trebuchet MS" pitchFamily="34" charset="0"/>
-                <a:ea typeface="Trebuchet MS" pitchFamily="34" charset="-122"/>
-                <a:cs typeface="Trebuchet MS" pitchFamily="34" charset="-120"/>
-              </a:rPr>
-              <a:t>3</a:t>
-            </a:r>
-            <a:endParaRPr lang="en-US" sz="2000" dirty="0">
-              <a:solidFill>
-                <a:prstClr val="white"/>
-              </a:solidFill>
-              <a:latin typeface="Trebuchet MS" panose="020B0603020202020204"/>
-            </a:endParaRPr>
-          </a:p>
-        </p:txBody>
-      </p:sp>
-      <p:sp>
-        <p:nvSpPr>
-          <p:cNvPr id="22" name="Text 20"/>
-          <p:cNvSpPr/>
-          <p:nvPr/>
-        </p:nvSpPr>
-        <p:spPr>
-          <a:xfrm>
-            <a:off x="8656320" y="3901440"/>
-            <a:ext cx="3108960" cy="365760"/>
-          </a:xfrm>
-          <a:prstGeom prst="rect">
-            <a:avLst/>
-          </a:prstGeom>
-          <a:noFill/>
-          <a:ln/>
-        </p:spPr>
-        <p:txBody>
-          <a:bodyPr wrap="square" lIns="0" tIns="0" rIns="0" bIns="0" rtlCol="0" anchor="ctr"/>
-          <a:lstStyle/>
-          <a:p>
-            <a:pPr defTabSz="609585"/>
-            <a:r>
-              <a:rPr lang="en-US" sz="1600" b="1" dirty="0">
-                <a:solidFill>
-                  <a:srgbClr val="FFFFFF"/>
-                </a:solidFill>
-                <a:latin typeface="Trebuchet MS" pitchFamily="34" charset="0"/>
-                <a:ea typeface="Trebuchet MS" pitchFamily="34" charset="-122"/>
-                <a:cs typeface="Trebuchet MS" pitchFamily="34" charset="-120"/>
-              </a:rPr>
-              <a:t>Render</a:t>
-            </a:r>
-            <a:endParaRPr lang="en-US" sz="1600" dirty="0">
-              <a:solidFill>
-                <a:prstClr val="white"/>
-              </a:solidFill>
-              <a:latin typeface="Trebuchet MS" panose="020B0603020202020204"/>
-            </a:endParaRPr>
-          </a:p>
-        </p:txBody>
-      </p:sp>
-      <p:sp>
-        <p:nvSpPr>
-          <p:cNvPr id="23" name="Text 21"/>
-          <p:cNvSpPr/>
-          <p:nvPr/>
-        </p:nvSpPr>
-        <p:spPr>
-          <a:xfrm>
-            <a:off x="8656320" y="4279392"/>
-            <a:ext cx="3108960" cy="792480"/>
-          </a:xfrm>
-          <a:prstGeom prst="rect">
-            <a:avLst/>
-          </a:prstGeom>
-          <a:noFill/>
-          <a:ln/>
-        </p:spPr>
-        <p:txBody>
-          <a:bodyPr wrap="square" lIns="0" tIns="0" rIns="0" bIns="0" rtlCol="0" anchor="t"/>
-          <a:lstStyle/>
-          <a:p>
-            <a:pPr defTabSz="609585"/>
-            <a:r>
-              <a:rPr lang="en-US" sz="1333" dirty="0">
-                <a:solidFill>
-                  <a:srgbClr val="E7E6E6"/>
-                </a:solidFill>
-                <a:latin typeface="Trebuchet MS" pitchFamily="34" charset="0"/>
-                <a:ea typeface="Trebuchet MS" pitchFamily="34" charset="-122"/>
-                <a:cs typeface="Trebuchet MS" pitchFamily="34" charset="-120"/>
-              </a:rPr>
-              <a:t>renderCatalogue converts [Book] → Markdown String.</a:t>
-            </a:r>
-            <a:endParaRPr lang="en-US" sz="1333" dirty="0">
-              <a:solidFill>
-                <a:prstClr val="white"/>
-              </a:solidFill>
-              <a:latin typeface="Trebuchet MS" panose="020B0603020202020204"/>
-            </a:endParaRPr>
-          </a:p>
-        </p:txBody>
-      </p:sp>
-      <p:sp>
-        <p:nvSpPr>
-          <p:cNvPr id="24" name="Shape 22"/>
-          <p:cNvSpPr/>
-          <p:nvPr/>
-        </p:nvSpPr>
-        <p:spPr>
-          <a:xfrm>
-            <a:off x="8229600" y="4474464"/>
-            <a:ext cx="60960" cy="670560"/>
-          </a:xfrm>
-          <a:prstGeom prst="rect">
-            <a:avLst/>
-          </a:prstGeom>
-          <a:solidFill>
-            <a:srgbClr val="39CDE7"/>
-          </a:solidFill>
-          <a:ln w="12700">
-            <a:solidFill>
-              <a:srgbClr val="39CDE7"/>
-            </a:solidFill>
-            <a:prstDash val="solid"/>
-          </a:ln>
-        </p:spPr>
-        <p:txBody>
-          <a:bodyPr/>
-          <a:lstStyle/>
-          <a:p>
-            <a:pPr defTabSz="609585"/>
-            <a:endParaRPr lang="en-US" sz="2400">
-              <a:solidFill>
-                <a:prstClr val="white"/>
-              </a:solidFill>
-              <a:latin typeface="Trebuchet MS" panose="020B0603020202020204"/>
-            </a:endParaRPr>
-          </a:p>
-        </p:txBody>
-      </p:sp>
-      <p:sp>
-        <p:nvSpPr>
-          <p:cNvPr id="25" name="Shape 23"/>
-          <p:cNvSpPr/>
-          <p:nvPr/>
-        </p:nvSpPr>
-        <p:spPr>
-          <a:xfrm>
-            <a:off x="7985760" y="5254752"/>
-            <a:ext cx="548640" cy="548640"/>
-          </a:xfrm>
-          <a:prstGeom prst="ellipse">
-            <a:avLst/>
-          </a:prstGeom>
-          <a:solidFill>
-            <a:srgbClr val="39CDE7"/>
-          </a:solidFill>
-          <a:ln w="12700">
-            <a:solidFill>
-              <a:srgbClr val="39CDE7"/>
-            </a:solidFill>
-            <a:prstDash val="solid"/>
-          </a:ln>
-        </p:spPr>
-        <p:txBody>
-          <a:bodyPr/>
-          <a:lstStyle/>
-          <a:p>
-            <a:pPr defTabSz="609585"/>
-            <a:endParaRPr lang="en-US" sz="2400">
-              <a:solidFill>
-                <a:prstClr val="white"/>
-              </a:solidFill>
-              <a:latin typeface="Trebuchet MS" panose="020B0603020202020204"/>
-            </a:endParaRPr>
-          </a:p>
-        </p:txBody>
-      </p:sp>
-      <p:sp>
-        <p:nvSpPr>
-          <p:cNvPr id="26" name="Text 24"/>
-          <p:cNvSpPr/>
-          <p:nvPr/>
-        </p:nvSpPr>
-        <p:spPr>
-          <a:xfrm>
-            <a:off x="7985760" y="5254752"/>
-            <a:ext cx="548640" cy="548640"/>
-          </a:xfrm>
-          <a:prstGeom prst="rect">
-            <a:avLst/>
-          </a:prstGeom>
-          <a:noFill/>
-          <a:ln/>
-        </p:spPr>
-        <p:txBody>
-          <a:bodyPr wrap="square" lIns="0" tIns="0" rIns="0" bIns="0" rtlCol="0" anchor="ctr"/>
-          <a:lstStyle/>
-          <a:p>
-            <a:pPr algn="ctr" defTabSz="609585"/>
-            <a:r>
-              <a:rPr lang="en-US" sz="2000" b="1" dirty="0">
-                <a:solidFill>
-                  <a:srgbClr val="1A1A2E"/>
-                </a:solidFill>
-                <a:latin typeface="Trebuchet MS" pitchFamily="34" charset="0"/>
-                <a:ea typeface="Trebuchet MS" pitchFamily="34" charset="-122"/>
-                <a:cs typeface="Trebuchet MS" pitchFamily="34" charset="-120"/>
-              </a:rPr>
-              <a:t>4</a:t>
-            </a:r>
-            <a:endParaRPr lang="en-US" sz="2000" dirty="0">
-              <a:solidFill>
-                <a:prstClr val="white"/>
-              </a:solidFill>
-              <a:latin typeface="Trebuchet MS" panose="020B0603020202020204"/>
-            </a:endParaRPr>
-          </a:p>
-        </p:txBody>
-      </p:sp>
-      <p:sp>
-        <p:nvSpPr>
-          <p:cNvPr id="27" name="Text 25"/>
-          <p:cNvSpPr/>
-          <p:nvPr/>
-        </p:nvSpPr>
-        <p:spPr>
-          <a:xfrm>
-            <a:off x="8656320" y="5266944"/>
-            <a:ext cx="3108960" cy="365760"/>
-          </a:xfrm>
-          <a:prstGeom prst="rect">
-            <a:avLst/>
-          </a:prstGeom>
-          <a:noFill/>
-          <a:ln/>
-        </p:spPr>
-        <p:txBody>
-          <a:bodyPr wrap="square" lIns="0" tIns="0" rIns="0" bIns="0" rtlCol="0" anchor="ctr"/>
-          <a:lstStyle/>
-          <a:p>
-            <a:pPr defTabSz="609585"/>
-            <a:r>
-              <a:rPr lang="en-US" sz="1600" b="1" dirty="0">
-                <a:solidFill>
-                  <a:srgbClr val="FFFFFF"/>
-                </a:solidFill>
-                <a:latin typeface="Trebuchet MS" pitchFamily="34" charset="0"/>
-                <a:ea typeface="Trebuchet MS" pitchFamily="34" charset="-122"/>
-                <a:cs typeface="Trebuchet MS" pitchFamily="34" charset="-120"/>
-              </a:rPr>
-              <a:t>Write</a:t>
-            </a:r>
-            <a:endParaRPr lang="en-US" sz="1600" dirty="0">
-              <a:solidFill>
-                <a:prstClr val="white"/>
-              </a:solidFill>
-              <a:latin typeface="Trebuchet MS" panose="020B0603020202020204"/>
-            </a:endParaRPr>
-          </a:p>
-        </p:txBody>
-      </p:sp>
-      <p:sp>
-        <p:nvSpPr>
-          <p:cNvPr id="28" name="Text 26"/>
-          <p:cNvSpPr/>
-          <p:nvPr/>
-        </p:nvSpPr>
-        <p:spPr>
-          <a:xfrm>
-            <a:off x="8656320" y="5644896"/>
-            <a:ext cx="3108960" cy="792480"/>
-          </a:xfrm>
-          <a:prstGeom prst="rect">
-            <a:avLst/>
-          </a:prstGeom>
-          <a:noFill/>
-          <a:ln/>
-        </p:spPr>
-        <p:txBody>
-          <a:bodyPr wrap="square" lIns="0" tIns="0" rIns="0" bIns="0" rtlCol="0" anchor="t"/>
-          <a:lstStyle/>
-          <a:p>
-            <a:pPr defTabSz="609585"/>
-            <a:r>
-              <a:rPr lang="en-US" sz="1333" dirty="0">
-                <a:solidFill>
-                  <a:srgbClr val="E7E6E6"/>
-                </a:solidFill>
-                <a:latin typeface="Trebuchet MS" pitchFamily="34" charset="0"/>
-                <a:ea typeface="Trebuchet MS" pitchFamily="34" charset="-122"/>
-                <a:cs typeface="Trebuchet MS" pitchFamily="34" charset="-120"/>
-              </a:rPr>
-              <a:t>writeFile saves the result to the output path.</a:t>
-            </a:r>
-            <a:endParaRPr lang="en-US" sz="1333" dirty="0">
-              <a:solidFill>
-                <a:prstClr val="white"/>
-              </a:solidFill>
-              <a:latin typeface="Trebuchet MS" panose="020B0603020202020204"/>
-            </a:endParaRPr>
-          </a:p>
-        </p:txBody>
-      </p:sp>
-      <p:sp>
-        <p:nvSpPr>
-          <p:cNvPr id="30" name="Text 28"/>
-          <p:cNvSpPr/>
-          <p:nvPr/>
-        </p:nvSpPr>
-        <p:spPr>
-          <a:xfrm>
-            <a:off x="670560" y="5340096"/>
-            <a:ext cx="6705600" cy="731520"/>
-          </a:xfrm>
-          <a:prstGeom prst="rect">
-            <a:avLst/>
-          </a:prstGeom>
-          <a:noFill/>
-          <a:ln/>
-        </p:spPr>
-        <p:txBody>
-          <a:bodyPr wrap="square" lIns="0" tIns="0" rIns="0" bIns="0" rtlCol="0" anchor="ctr"/>
-          <a:lstStyle/>
-          <a:p>
-            <a:pPr defTabSz="609585"/>
-            <a:endParaRPr lang="en-US" sz="1733" dirty="0">
-              <a:solidFill>
-                <a:prstClr val="white"/>
-              </a:solidFill>
-              <a:latin typeface="Trebuchet MS" panose="020B0603020202020204"/>
+        </p:spPr>
+        <p:txBody>
+          <a:bodyPr wrap="square">
+            <a:spAutoFit/>
+          </a:bodyPr>
+          <a:lstStyle/>
+          <a:p>
+            <a:pPr lvl="0" eaLnBrk="0" fontAlgn="base" hangingPunct="0">
+              <a:spcBef>
+                <a:spcPct val="0"/>
+              </a:spcBef>
+              <a:spcAft>
+                <a:spcPct val="0"/>
+              </a:spcAft>
+            </a:pPr>
+            <a:r>
+              <a:rPr lang="en-IE" sz="1400" dirty="0"/>
+              <a:t>data </a:t>
+            </a:r>
+            <a:r>
+              <a:rPr lang="en-IE" sz="1400" dirty="0" err="1"/>
+              <a:t>NonEmpty</a:t>
+            </a:r>
+            <a:r>
+              <a:rPr lang="en-IE" sz="1400" dirty="0"/>
+              <a:t> a = a :| [a]. –-- where :| constructor takes a </a:t>
+            </a:r>
+            <a:r>
+              <a:rPr lang="en-IE" sz="1400" i="1" dirty="0"/>
+              <a:t>head</a:t>
+            </a:r>
+            <a:r>
+              <a:rPr lang="en-IE" sz="1400" dirty="0"/>
+              <a:t> element and a </a:t>
+            </a:r>
+          </a:p>
+          <a:p>
+            <a:pPr lvl="0" eaLnBrk="0" fontAlgn="base" hangingPunct="0">
+              <a:spcBef>
+                <a:spcPct val="0"/>
+              </a:spcBef>
+              <a:spcAft>
+                <a:spcPct val="0"/>
+              </a:spcAft>
+            </a:pPr>
+            <a:r>
+              <a:rPr lang="en-IE" sz="1400" dirty="0"/>
+              <a:t>---(possibly empty) tail list. This means that a </a:t>
+            </a:r>
+            <a:r>
+              <a:rPr lang="en-IE" sz="1400" dirty="0" err="1"/>
+              <a:t>NonEmpty</a:t>
+            </a:r>
+            <a:r>
+              <a:rPr lang="en-IE" sz="1400" dirty="0"/>
+              <a:t> list can never be constructed as an empty list</a:t>
+            </a:r>
+            <a:endParaRPr kumimoji="0" lang="en-US" altLang="en-US" sz="1400" b="0" i="0" u="none" strike="noStrike" cap="none" normalizeH="0" baseline="0" dirty="0">
+              <a:ln>
+                <a:noFill/>
+              </a:ln>
+              <a:solidFill>
+                <a:schemeClr val="tx1"/>
+              </a:solidFill>
+              <a:effectLst/>
             </a:endParaRPr>
           </a:p>
         </p:txBody>
       </p:sp>
     </p:spTree>
+    <p:extLst>
+      <p:ext uri="{BB962C8B-B14F-4D97-AF65-F5344CB8AC3E}">
+        <p14:creationId xmlns:p14="http://schemas.microsoft.com/office/powerpoint/2010/main" val="1474670282"/>
+      </p:ext>
+    </p:extLst>
   </p:cSld>
   <p:clrMapOvr>
     <a:masterClrMapping/>
@@ -16388,6 +15392,685 @@
       </p:grpSpPr>
       <p:sp>
         <p:nvSpPr>
+          <p:cNvPr id="2" name="Title 1">
+            <a:extLst>
+              <a:ext uri="{FF2B5EF4-FFF2-40B4-BE49-F238E27FC236}">
+                <a16:creationId xmlns:a16="http://schemas.microsoft.com/office/drawing/2014/main" id="{4829BA8C-A7E0-87EA-C61E-342E1AE4496B}"/>
+              </a:ext>
+            </a:extLst>
+          </p:cNvPr>
+          <p:cNvSpPr>
+            <a:spLocks noGrp="1"/>
+          </p:cNvSpPr>
+          <p:nvPr>
+            <p:ph type="title"/>
+          </p:nvPr>
+        </p:nvSpPr>
+        <p:spPr/>
+        <p:txBody>
+          <a:bodyPr/>
+          <a:lstStyle/>
+          <a:p>
+            <a:r>
+              <a:rPr lang="en-US" dirty="0"/>
+              <a:t>Why does this help? </a:t>
+            </a:r>
+          </a:p>
+        </p:txBody>
+      </p:sp>
+      <p:sp>
+        <p:nvSpPr>
+          <p:cNvPr id="3" name="Content Placeholder 2">
+            <a:extLst>
+              <a:ext uri="{FF2B5EF4-FFF2-40B4-BE49-F238E27FC236}">
+                <a16:creationId xmlns:a16="http://schemas.microsoft.com/office/drawing/2014/main" id="{55A663D8-9A7F-4DC3-F1A4-55CAC0AF88CB}"/>
+              </a:ext>
+            </a:extLst>
+          </p:cNvPr>
+          <p:cNvSpPr>
+            <a:spLocks noGrp="1"/>
+          </p:cNvSpPr>
+          <p:nvPr>
+            <p:ph idx="1"/>
+          </p:nvPr>
+        </p:nvSpPr>
+        <p:spPr>
+          <a:xfrm>
+            <a:off x="421528" y="2055126"/>
+            <a:ext cx="9613861" cy="1174078"/>
+          </a:xfrm>
+        </p:spPr>
+        <p:txBody>
+          <a:bodyPr/>
+          <a:lstStyle/>
+          <a:p>
+            <a:pPr marL="0" indent="0">
+              <a:buNone/>
+            </a:pPr>
+            <a:r>
+              <a:rPr lang="en-IE" dirty="0"/>
+              <a:t>A book with zero authors is almost certainly a data error. </a:t>
+            </a:r>
+          </a:p>
+          <a:p>
+            <a:pPr marL="0" indent="0">
+              <a:buNone/>
+            </a:pPr>
+            <a:r>
+              <a:rPr lang="en-IE" dirty="0"/>
+              <a:t>If you changed this to </a:t>
+            </a:r>
+            <a:r>
+              <a:rPr lang="en-IE" dirty="0" err="1"/>
+              <a:t>NonEmpty</a:t>
+            </a:r>
+            <a:r>
+              <a:rPr lang="en-IE" dirty="0"/>
+              <a:t> Author, the type itself would </a:t>
+            </a:r>
+            <a:r>
+              <a:rPr lang="en-IE" i="1" dirty="0"/>
+              <a:t>enforce</a:t>
+            </a:r>
+            <a:r>
+              <a:rPr lang="en-IE" dirty="0"/>
+              <a:t> that every Book has at least one author — no runtime check needed.</a:t>
+            </a:r>
+            <a:endParaRPr lang="en-US" dirty="0"/>
+          </a:p>
+        </p:txBody>
+      </p:sp>
+      <p:sp>
+        <p:nvSpPr>
+          <p:cNvPr id="5" name="TextBox 4">
+            <a:extLst>
+              <a:ext uri="{FF2B5EF4-FFF2-40B4-BE49-F238E27FC236}">
+                <a16:creationId xmlns:a16="http://schemas.microsoft.com/office/drawing/2014/main" id="{7A5506E3-6C8B-3797-E36E-6992B01465B0}"/>
+              </a:ext>
+            </a:extLst>
+          </p:cNvPr>
+          <p:cNvSpPr txBox="1"/>
+          <p:nvPr/>
+        </p:nvSpPr>
+        <p:spPr>
+          <a:xfrm>
+            <a:off x="521898" y="3011266"/>
+            <a:ext cx="7880230" cy="1477328"/>
+          </a:xfrm>
+          <a:prstGeom prst="rect">
+            <a:avLst/>
+          </a:prstGeom>
+          <a:solidFill>
+            <a:schemeClr val="bg2">
+              <a:lumMod val="60000"/>
+              <a:lumOff val="40000"/>
+            </a:schemeClr>
+          </a:solidFill>
+        </p:spPr>
+        <p:txBody>
+          <a:bodyPr wrap="square">
+            <a:spAutoFit/>
+          </a:bodyPr>
+          <a:lstStyle/>
+          <a:p>
+            <a:r>
+              <a:rPr lang="en-IE" dirty="0">
+                <a:effectLst/>
+              </a:rPr>
+              <a:t>import</a:t>
+            </a:r>
+            <a:r>
+              <a:rPr lang="en-IE" dirty="0"/>
+              <a:t> </a:t>
+            </a:r>
+            <a:r>
+              <a:rPr lang="en-IE" dirty="0" err="1"/>
+              <a:t>Data</a:t>
+            </a:r>
+            <a:r>
+              <a:rPr lang="en-IE" dirty="0" err="1">
+                <a:effectLst/>
+              </a:rPr>
+              <a:t>.</a:t>
+            </a:r>
+            <a:r>
+              <a:rPr lang="en-IE" dirty="0" err="1"/>
+              <a:t>List</a:t>
+            </a:r>
+            <a:r>
+              <a:rPr lang="en-IE" dirty="0" err="1">
+                <a:effectLst/>
+              </a:rPr>
+              <a:t>.</a:t>
+            </a:r>
+            <a:r>
+              <a:rPr lang="en-IE" dirty="0" err="1"/>
+              <a:t>NonEmpty</a:t>
+            </a:r>
+            <a:r>
+              <a:rPr lang="en-IE" dirty="0"/>
+              <a:t> </a:t>
+            </a:r>
+            <a:r>
+              <a:rPr lang="en-IE" dirty="0">
+                <a:effectLst/>
+              </a:rPr>
+              <a:t>(</a:t>
+            </a:r>
+            <a:r>
+              <a:rPr lang="en-IE" dirty="0" err="1">
+                <a:effectLst/>
+              </a:rPr>
+              <a:t>NonEmpty</a:t>
+            </a:r>
+            <a:r>
+              <a:rPr lang="en-IE" dirty="0">
+                <a:effectLst/>
+              </a:rPr>
+              <a:t>,</a:t>
+            </a:r>
+            <a:r>
+              <a:rPr lang="en-IE" dirty="0"/>
+              <a:t> </a:t>
+            </a:r>
+            <a:r>
+              <a:rPr lang="en-IE" dirty="0" err="1"/>
+              <a:t>nonEmpty</a:t>
+            </a:r>
+            <a:r>
+              <a:rPr lang="en-IE" dirty="0">
+                <a:effectLst/>
+              </a:rPr>
+              <a:t>)</a:t>
+            </a:r>
+            <a:r>
+              <a:rPr lang="en-IE" dirty="0"/>
+              <a:t> </a:t>
+            </a:r>
+          </a:p>
+          <a:p>
+            <a:endParaRPr lang="en-IE" dirty="0">
+              <a:effectLst/>
+            </a:endParaRPr>
+          </a:p>
+          <a:p>
+            <a:r>
+              <a:rPr lang="en-IE" dirty="0">
+                <a:effectLst/>
+              </a:rPr>
+              <a:t>data</a:t>
+            </a:r>
+            <a:r>
+              <a:rPr lang="en-IE" dirty="0"/>
+              <a:t> </a:t>
+            </a:r>
+            <a:r>
+              <a:rPr lang="en-IE" dirty="0">
+                <a:effectLst/>
+              </a:rPr>
+              <a:t>Book</a:t>
+            </a:r>
+            <a:r>
+              <a:rPr lang="en-IE" dirty="0"/>
+              <a:t> </a:t>
+            </a:r>
+            <a:r>
+              <a:rPr lang="en-IE" dirty="0">
+                <a:effectLst/>
+              </a:rPr>
+              <a:t>=</a:t>
+            </a:r>
+            <a:r>
+              <a:rPr lang="en-IE" dirty="0"/>
+              <a:t> </a:t>
+            </a:r>
+            <a:r>
+              <a:rPr lang="en-IE" dirty="0">
+                <a:effectLst/>
+              </a:rPr>
+              <a:t>Book</a:t>
+            </a:r>
+            <a:r>
+              <a:rPr lang="en-IE" dirty="0"/>
+              <a:t> </a:t>
+            </a:r>
+            <a:r>
+              <a:rPr lang="en-IE" dirty="0">
+                <a:effectLst/>
+              </a:rPr>
+              <a:t>{</a:t>
+            </a:r>
+            <a:r>
+              <a:rPr lang="en-IE" dirty="0"/>
+              <a:t> </a:t>
+            </a:r>
+            <a:r>
+              <a:rPr lang="en-IE" dirty="0">
+                <a:effectLst/>
+              </a:rPr>
+              <a:t>...</a:t>
+            </a:r>
+            <a:r>
+              <a:rPr lang="en-IE" dirty="0"/>
+              <a:t> </a:t>
+            </a:r>
+            <a:r>
+              <a:rPr lang="en-IE" dirty="0">
+                <a:effectLst/>
+              </a:rPr>
+              <a:t>,</a:t>
+            </a:r>
+            <a:r>
+              <a:rPr lang="en-IE" dirty="0"/>
+              <a:t> </a:t>
+            </a:r>
+          </a:p>
+          <a:p>
+            <a:r>
+              <a:rPr lang="en-IE" dirty="0"/>
+              <a:t>	authors </a:t>
+            </a:r>
+            <a:r>
+              <a:rPr lang="en-IE" dirty="0">
+                <a:effectLst/>
+              </a:rPr>
+              <a:t>::</a:t>
+            </a:r>
+            <a:r>
+              <a:rPr lang="en-IE" dirty="0"/>
+              <a:t> </a:t>
+            </a:r>
+            <a:r>
+              <a:rPr lang="en-IE" dirty="0" err="1">
+                <a:effectLst/>
+              </a:rPr>
+              <a:t>NonEmpty</a:t>
+            </a:r>
+            <a:r>
+              <a:rPr lang="en-IE" dirty="0"/>
+              <a:t> </a:t>
+            </a:r>
+            <a:r>
+              <a:rPr lang="en-IE" dirty="0">
+                <a:effectLst/>
+              </a:rPr>
+              <a:t>Author</a:t>
+            </a:r>
+            <a:r>
+              <a:rPr lang="en-IE" dirty="0"/>
+              <a:t> </a:t>
+            </a:r>
+            <a:r>
+              <a:rPr lang="en-IE" dirty="0">
+                <a:effectLst/>
+              </a:rPr>
+              <a:t>-- guaranteed non-empty</a:t>
+            </a:r>
+            <a:r>
+              <a:rPr lang="en-IE" dirty="0"/>
+              <a:t> </a:t>
+            </a:r>
+            <a:r>
+              <a:rPr lang="en-IE" dirty="0">
+                <a:effectLst/>
+              </a:rPr>
+              <a:t>,</a:t>
+            </a:r>
+          </a:p>
+          <a:p>
+            <a:r>
+              <a:rPr lang="en-IE" dirty="0"/>
+              <a:t>              </a:t>
+            </a:r>
+            <a:r>
+              <a:rPr lang="en-IE" dirty="0">
+                <a:effectLst/>
+              </a:rPr>
+              <a:t>...</a:t>
+            </a:r>
+            <a:r>
+              <a:rPr lang="en-IE" dirty="0"/>
+              <a:t> </a:t>
+            </a:r>
+            <a:r>
+              <a:rPr lang="en-IE" dirty="0">
+                <a:effectLst/>
+              </a:rPr>
+              <a:t>}</a:t>
+            </a:r>
+            <a:endParaRPr lang="en-US" dirty="0"/>
+          </a:p>
+        </p:txBody>
+      </p:sp>
+      <p:sp>
+        <p:nvSpPr>
+          <p:cNvPr id="7" name="TextBox 6">
+            <a:extLst>
+              <a:ext uri="{FF2B5EF4-FFF2-40B4-BE49-F238E27FC236}">
+                <a16:creationId xmlns:a16="http://schemas.microsoft.com/office/drawing/2014/main" id="{0BA6600D-D4CA-F164-C9D6-36897A24F03C}"/>
+              </a:ext>
+            </a:extLst>
+          </p:cNvPr>
+          <p:cNvSpPr txBox="1"/>
+          <p:nvPr/>
+        </p:nvSpPr>
+        <p:spPr>
+          <a:xfrm>
+            <a:off x="521898" y="5739358"/>
+            <a:ext cx="7086600" cy="923330"/>
+          </a:xfrm>
+          <a:prstGeom prst="rect">
+            <a:avLst/>
+          </a:prstGeom>
+          <a:solidFill>
+            <a:schemeClr val="bg2">
+              <a:lumMod val="60000"/>
+              <a:lumOff val="40000"/>
+            </a:schemeClr>
+          </a:solidFill>
+        </p:spPr>
+        <p:txBody>
+          <a:bodyPr wrap="square">
+            <a:spAutoFit/>
+          </a:bodyPr>
+          <a:lstStyle/>
+          <a:p>
+            <a:r>
+              <a:rPr lang="en-IE" dirty="0">
+                <a:effectLst/>
+              </a:rPr>
+              <a:t>case</a:t>
+            </a:r>
+            <a:r>
+              <a:rPr lang="en-IE" dirty="0"/>
+              <a:t> </a:t>
+            </a:r>
+            <a:r>
+              <a:rPr lang="en-IE" dirty="0" err="1"/>
+              <a:t>nonEmpty</a:t>
+            </a:r>
+            <a:r>
+              <a:rPr lang="en-IE" dirty="0"/>
+              <a:t> </a:t>
+            </a:r>
+            <a:r>
+              <a:rPr lang="en-IE" dirty="0">
+                <a:effectLst/>
+              </a:rPr>
+              <a:t>(map</a:t>
+            </a:r>
+            <a:r>
+              <a:rPr lang="en-IE" dirty="0"/>
+              <a:t> </a:t>
+            </a:r>
+            <a:r>
+              <a:rPr lang="en-IE" dirty="0" err="1"/>
+              <a:t>parseAuthor</a:t>
+            </a:r>
+            <a:r>
+              <a:rPr lang="en-IE" dirty="0"/>
+              <a:t> </a:t>
+            </a:r>
+            <a:r>
+              <a:rPr lang="en-IE" dirty="0" err="1"/>
+              <a:t>authorEls</a:t>
+            </a:r>
+            <a:r>
+              <a:rPr lang="en-IE" dirty="0">
+                <a:effectLst/>
+              </a:rPr>
+              <a:t>)</a:t>
+            </a:r>
+            <a:r>
+              <a:rPr lang="en-IE" dirty="0"/>
+              <a:t> </a:t>
+            </a:r>
+            <a:r>
+              <a:rPr lang="en-IE" dirty="0">
+                <a:effectLst/>
+              </a:rPr>
+              <a:t>of</a:t>
+            </a:r>
+            <a:r>
+              <a:rPr lang="en-IE" dirty="0"/>
+              <a:t> </a:t>
+            </a:r>
+          </a:p>
+          <a:p>
+            <a:r>
+              <a:rPr lang="en-IE" dirty="0">
+                <a:effectLst/>
+              </a:rPr>
+              <a:t>Nothing</a:t>
+            </a:r>
+            <a:r>
+              <a:rPr lang="en-IE" dirty="0"/>
+              <a:t> </a:t>
+            </a:r>
+            <a:r>
+              <a:rPr lang="en-IE" dirty="0">
+                <a:effectLst/>
+              </a:rPr>
+              <a:t>-&gt;</a:t>
+            </a:r>
+            <a:r>
+              <a:rPr lang="en-IE" dirty="0"/>
+              <a:t> </a:t>
+            </a:r>
+            <a:r>
+              <a:rPr lang="en-IE" dirty="0">
+                <a:effectLst/>
+              </a:rPr>
+              <a:t>error</a:t>
+            </a:r>
+            <a:r>
+              <a:rPr lang="en-IE" dirty="0"/>
+              <a:t> </a:t>
+            </a:r>
+            <a:r>
+              <a:rPr lang="en-IE" dirty="0">
+                <a:effectLst/>
+              </a:rPr>
+              <a:t>"Book has no authors"</a:t>
+            </a:r>
+            <a:r>
+              <a:rPr lang="en-IE" dirty="0"/>
+              <a:t> </a:t>
+            </a:r>
+            <a:r>
+              <a:rPr lang="en-IE" dirty="0">
+                <a:effectLst/>
+              </a:rPr>
+              <a:t>-- or return a Left / Nothing</a:t>
+            </a:r>
+            <a:r>
+              <a:rPr lang="en-IE" dirty="0"/>
+              <a:t> </a:t>
+            </a:r>
+            <a:r>
+              <a:rPr lang="en-IE" dirty="0">
+                <a:effectLst/>
+              </a:rPr>
+              <a:t>Just</a:t>
+            </a:r>
+            <a:r>
+              <a:rPr lang="en-IE" dirty="0"/>
+              <a:t> as </a:t>
+            </a:r>
+            <a:r>
+              <a:rPr lang="en-IE" dirty="0">
+                <a:effectLst/>
+              </a:rPr>
+              <a:t>-&gt;</a:t>
+            </a:r>
+            <a:r>
+              <a:rPr lang="en-IE" dirty="0"/>
+              <a:t> </a:t>
+            </a:r>
+            <a:r>
+              <a:rPr lang="en-IE" dirty="0">
+                <a:effectLst/>
+              </a:rPr>
+              <a:t>...</a:t>
+            </a:r>
+            <a:r>
+              <a:rPr lang="en-IE" dirty="0"/>
+              <a:t> </a:t>
+            </a:r>
+            <a:r>
+              <a:rPr lang="en-IE" dirty="0">
+                <a:effectLst/>
+              </a:rPr>
+              <a:t>-- as :: </a:t>
+            </a:r>
+            <a:r>
+              <a:rPr lang="en-IE" dirty="0" err="1">
+                <a:effectLst/>
+              </a:rPr>
+              <a:t>NonEmpty</a:t>
+            </a:r>
+            <a:r>
+              <a:rPr lang="en-IE" dirty="0">
+                <a:effectLst/>
+              </a:rPr>
+              <a:t> Author</a:t>
+            </a:r>
+            <a:endParaRPr lang="en-US" dirty="0"/>
+          </a:p>
+        </p:txBody>
+      </p:sp>
+      <p:sp>
+        <p:nvSpPr>
+          <p:cNvPr id="9" name="TextBox 8">
+            <a:extLst>
+              <a:ext uri="{FF2B5EF4-FFF2-40B4-BE49-F238E27FC236}">
+                <a16:creationId xmlns:a16="http://schemas.microsoft.com/office/drawing/2014/main" id="{FDC0643B-FEC5-E943-1E75-A00328054B6D}"/>
+              </a:ext>
+            </a:extLst>
+          </p:cNvPr>
+          <p:cNvSpPr txBox="1"/>
+          <p:nvPr/>
+        </p:nvSpPr>
+        <p:spPr>
+          <a:xfrm>
+            <a:off x="521898" y="4595840"/>
+            <a:ext cx="7655944" cy="923330"/>
+          </a:xfrm>
+          <a:prstGeom prst="rect">
+            <a:avLst/>
+          </a:prstGeom>
+          <a:noFill/>
+        </p:spPr>
+        <p:txBody>
+          <a:bodyPr wrap="square">
+            <a:spAutoFit/>
+          </a:bodyPr>
+          <a:lstStyle/>
+          <a:p>
+            <a:r>
+              <a:rPr lang="en-IE" dirty="0"/>
+              <a:t>Then in </a:t>
+            </a:r>
+            <a:r>
+              <a:rPr lang="en-IE" dirty="0" err="1">
+                <a:latin typeface="Courier New" panose="02070309020205020404" pitchFamily="49" charset="0"/>
+              </a:rPr>
+              <a:t>parseBook</a:t>
+            </a:r>
+            <a:r>
+              <a:rPr lang="en-IE" dirty="0"/>
+              <a:t>, instead of </a:t>
+            </a:r>
+            <a:r>
+              <a:rPr lang="en-IE" dirty="0">
+                <a:latin typeface="Courier New" panose="02070309020205020404" pitchFamily="49" charset="0"/>
+              </a:rPr>
+              <a:t>maybe [] (</a:t>
+            </a:r>
+            <a:r>
+              <a:rPr lang="en-IE" dirty="0" err="1">
+                <a:latin typeface="Courier New" panose="02070309020205020404" pitchFamily="49" charset="0"/>
+              </a:rPr>
+              <a:t>findChildren</a:t>
+            </a:r>
+            <a:r>
+              <a:rPr lang="en-IE" dirty="0">
+                <a:latin typeface="Courier New" panose="02070309020205020404" pitchFamily="49" charset="0"/>
+              </a:rPr>
+              <a:t> ...)</a:t>
+            </a:r>
+            <a:r>
+              <a:rPr lang="en-IE" dirty="0"/>
+              <a:t>, you'd use </a:t>
+            </a:r>
+            <a:r>
+              <a:rPr lang="en-IE" dirty="0" err="1">
+                <a:latin typeface="Courier New" panose="02070309020205020404" pitchFamily="49" charset="0"/>
+              </a:rPr>
+              <a:t>nonEmpty</a:t>
+            </a:r>
+            <a:r>
+              <a:rPr lang="en-IE" dirty="0"/>
+              <a:t> (which returns </a:t>
+            </a:r>
+            <a:r>
+              <a:rPr lang="en-IE" dirty="0">
+                <a:latin typeface="Courier New" panose="02070309020205020404" pitchFamily="49" charset="0"/>
+              </a:rPr>
+              <a:t>Maybe (</a:t>
+            </a:r>
+            <a:r>
+              <a:rPr lang="en-IE" dirty="0" err="1">
+                <a:latin typeface="Courier New" panose="02070309020205020404" pitchFamily="49" charset="0"/>
+              </a:rPr>
+              <a:t>NonEmpty</a:t>
+            </a:r>
+            <a:r>
+              <a:rPr lang="en-IE" dirty="0">
+                <a:latin typeface="Courier New" panose="02070309020205020404" pitchFamily="49" charset="0"/>
+              </a:rPr>
+              <a:t> a)</a:t>
+            </a:r>
+            <a:r>
+              <a:rPr lang="en-IE" dirty="0"/>
+              <a:t>) and handle the empty case explicitly:</a:t>
+            </a:r>
+            <a:endParaRPr lang="en-US" dirty="0"/>
+          </a:p>
+        </p:txBody>
+      </p:sp>
+    </p:spTree>
+    <p:extLst>
+      <p:ext uri="{BB962C8B-B14F-4D97-AF65-F5344CB8AC3E}">
+        <p14:creationId xmlns:p14="http://schemas.microsoft.com/office/powerpoint/2010/main" val="1340554962"/>
+      </p:ext>
+    </p:extLst>
+  </p:cSld>
+  <p:clrMapOvr>
+    <a:masterClrMapping/>
+  </p:clrMapOvr>
+</p:sld>
+</file>
+
+<file path=ppt/slides/slide15.xml><?xml version="1.0" encoding="utf-8"?>
+<p:sld xmlns:a="http://schemas.openxmlformats.org/drawingml/2006/main" xmlns:r="http://schemas.openxmlformats.org/officeDocument/2006/relationships" xmlns:p="http://schemas.openxmlformats.org/presentationml/2006/main">
+  <p:cSld>
+    <p:spTree>
+      <p:nvGrpSpPr>
+        <p:cNvPr id="1" name=""/>
+        <p:cNvGrpSpPr/>
+        <p:nvPr/>
+      </p:nvGrpSpPr>
+      <p:grpSpPr>
+        <a:xfrm>
+          <a:off x="0" y="0"/>
+          <a:ext cx="0" cy="0"/>
+          <a:chOff x="0" y="0"/>
+          <a:chExt cx="0" cy="0"/>
+        </a:xfrm>
+      </p:grpSpPr>
+      <p:sp>
+        <p:nvSpPr>
           <p:cNvPr id="2" name="Shape 0"/>
           <p:cNvSpPr/>
           <p:nvPr/>
@@ -16498,6 +16181,1479 @@
                 <a:ea typeface="Trebuchet MS" pitchFamily="34" charset="-122"/>
                 <a:cs typeface="Trebuchet MS" pitchFamily="34" charset="-120"/>
               </a:rPr>
+              <a:t>Wiring It All Together</a:t>
+            </a:r>
+            <a:endParaRPr lang="en-US" sz="2933" dirty="0">
+              <a:solidFill>
+                <a:prstClr val="white"/>
+              </a:solidFill>
+              <a:latin typeface="Trebuchet MS" panose="020B0603020202020204"/>
+            </a:endParaRPr>
+          </a:p>
+        </p:txBody>
+      </p:sp>
+      <p:sp>
+        <p:nvSpPr>
+          <p:cNvPr id="5" name="Shape 3"/>
+          <p:cNvSpPr/>
+          <p:nvPr/>
+        </p:nvSpPr>
+        <p:spPr>
+          <a:xfrm>
+            <a:off x="11155680" y="0"/>
+            <a:ext cx="1036320" cy="707136"/>
+          </a:xfrm>
+          <a:prstGeom prst="rect">
+            <a:avLst/>
+          </a:prstGeom>
+          <a:solidFill>
+            <a:srgbClr val="39CDE7"/>
+          </a:solidFill>
+          <a:ln w="12700">
+            <a:solidFill>
+              <a:srgbClr val="39CDE7"/>
+            </a:solidFill>
+            <a:prstDash val="solid"/>
+          </a:ln>
+        </p:spPr>
+        <p:txBody>
+          <a:bodyPr/>
+          <a:lstStyle/>
+          <a:p>
+            <a:pPr defTabSz="609585"/>
+            <a:endParaRPr lang="en-US" sz="2400">
+              <a:solidFill>
+                <a:prstClr val="white"/>
+              </a:solidFill>
+              <a:latin typeface="Trebuchet MS" panose="020B0603020202020204"/>
+            </a:endParaRPr>
+          </a:p>
+        </p:txBody>
+      </p:sp>
+      <p:sp>
+        <p:nvSpPr>
+          <p:cNvPr id="6" name="Text 4"/>
+          <p:cNvSpPr/>
+          <p:nvPr/>
+        </p:nvSpPr>
+        <p:spPr>
+          <a:xfrm>
+            <a:off x="11155680" y="0"/>
+            <a:ext cx="1036320" cy="707136"/>
+          </a:xfrm>
+          <a:prstGeom prst="rect">
+            <a:avLst/>
+          </a:prstGeom>
+          <a:noFill/>
+          <a:ln/>
+        </p:spPr>
+        <p:txBody>
+          <a:bodyPr wrap="square" lIns="0" tIns="0" rIns="0" bIns="0" rtlCol="0" anchor="ctr"/>
+          <a:lstStyle/>
+          <a:p>
+            <a:pPr algn="ctr" defTabSz="609585"/>
+            <a:r>
+              <a:rPr lang="en-US" sz="2133" b="1" dirty="0">
+                <a:solidFill>
+                  <a:srgbClr val="1A1A2E"/>
+                </a:solidFill>
+                <a:latin typeface="Trebuchet MS" pitchFamily="34" charset="0"/>
+                <a:ea typeface="Trebuchet MS" pitchFamily="34" charset="-122"/>
+                <a:cs typeface="Trebuchet MS" pitchFamily="34" charset="-120"/>
+              </a:rPr>
+              <a:t>9</a:t>
+            </a:r>
+            <a:endParaRPr lang="en-US" sz="2133" dirty="0">
+              <a:solidFill>
+                <a:prstClr val="white"/>
+              </a:solidFill>
+              <a:latin typeface="Trebuchet MS" panose="020B0603020202020204"/>
+            </a:endParaRPr>
+          </a:p>
+        </p:txBody>
+      </p:sp>
+      <p:sp>
+        <p:nvSpPr>
+          <p:cNvPr id="7" name="Shape 5"/>
+          <p:cNvSpPr/>
+          <p:nvPr/>
+        </p:nvSpPr>
+        <p:spPr>
+          <a:xfrm>
+            <a:off x="487680" y="1036320"/>
+            <a:ext cx="7071360" cy="3243072"/>
+          </a:xfrm>
+          <a:prstGeom prst="rect">
+            <a:avLst/>
+          </a:prstGeom>
+          <a:solidFill>
+            <a:srgbClr val="0D1B2A"/>
+          </a:solidFill>
+          <a:ln w="12700">
+            <a:solidFill>
+              <a:srgbClr val="39CDE7"/>
+            </a:solidFill>
+            <a:prstDash val="solid"/>
+          </a:ln>
+        </p:spPr>
+        <p:txBody>
+          <a:bodyPr/>
+          <a:lstStyle/>
+          <a:p>
+            <a:pPr defTabSz="609585"/>
+            <a:endParaRPr lang="en-US" sz="2400">
+              <a:solidFill>
+                <a:prstClr val="white"/>
+              </a:solidFill>
+              <a:latin typeface="Trebuchet MS" panose="020B0603020202020204"/>
+            </a:endParaRPr>
+          </a:p>
+        </p:txBody>
+      </p:sp>
+      <p:sp>
+        <p:nvSpPr>
+          <p:cNvPr id="8" name="Text 6"/>
+          <p:cNvSpPr/>
+          <p:nvPr/>
+        </p:nvSpPr>
+        <p:spPr>
+          <a:xfrm>
+            <a:off x="6681216" y="1085088"/>
+            <a:ext cx="792480" cy="219456"/>
+          </a:xfrm>
+          <a:prstGeom prst="rect">
+            <a:avLst/>
+          </a:prstGeom>
+          <a:noFill/>
+          <a:ln/>
+        </p:spPr>
+        <p:txBody>
+          <a:bodyPr wrap="square" lIns="0" tIns="0" rIns="0" bIns="0" rtlCol="0" anchor="ctr"/>
+          <a:lstStyle/>
+          <a:p>
+            <a:pPr algn="r" defTabSz="609585"/>
+            <a:r>
+              <a:rPr lang="en-US" sz="933" i="1" dirty="0">
+                <a:solidFill>
+                  <a:srgbClr val="39CDE7"/>
+                </a:solidFill>
+                <a:latin typeface="Trebuchet MS" panose="020B0603020202020204"/>
+              </a:rPr>
+              <a:t>Haskell</a:t>
+            </a:r>
+            <a:endParaRPr lang="en-US" sz="933" dirty="0">
+              <a:solidFill>
+                <a:prstClr val="white"/>
+              </a:solidFill>
+              <a:latin typeface="Trebuchet MS" panose="020B0603020202020204"/>
+            </a:endParaRPr>
+          </a:p>
+        </p:txBody>
+      </p:sp>
+      <p:sp>
+        <p:nvSpPr>
+          <p:cNvPr id="9" name="Text 7"/>
+          <p:cNvSpPr/>
+          <p:nvPr/>
+        </p:nvSpPr>
+        <p:spPr>
+          <a:xfrm>
+            <a:off x="658368" y="1304544"/>
+            <a:ext cx="6729984" cy="3755136"/>
+          </a:xfrm>
+          <a:prstGeom prst="rect">
+            <a:avLst/>
+          </a:prstGeom>
+          <a:noFill/>
+          <a:ln/>
+        </p:spPr>
+        <p:txBody>
+          <a:bodyPr wrap="square" lIns="0" tIns="0" rIns="0" bIns="0" rtlCol="0" anchor="t"/>
+          <a:lstStyle/>
+          <a:p>
+            <a:pPr defTabSz="609585"/>
+            <a:r>
+              <a:rPr lang="en-US" sz="1267" dirty="0">
+                <a:solidFill>
+                  <a:srgbClr val="E7E6E6"/>
+                </a:solidFill>
+                <a:latin typeface="Consolas" pitchFamily="34" charset="0"/>
+                <a:ea typeface="Consolas" pitchFamily="34" charset="-122"/>
+                <a:cs typeface="Consolas" pitchFamily="34" charset="-120"/>
+              </a:rPr>
+              <a:t>module Main where</a:t>
+            </a:r>
+            <a:endParaRPr lang="en-US" sz="1267" dirty="0">
+              <a:solidFill>
+                <a:prstClr val="white"/>
+              </a:solidFill>
+              <a:latin typeface="Trebuchet MS" panose="020B0603020202020204"/>
+            </a:endParaRPr>
+          </a:p>
+          <a:p>
+            <a:pPr defTabSz="609585"/>
+            <a:endParaRPr lang="en-US" sz="1267" dirty="0">
+              <a:solidFill>
+                <a:prstClr val="white"/>
+              </a:solidFill>
+              <a:latin typeface="Trebuchet MS" panose="020B0603020202020204"/>
+            </a:endParaRPr>
+          </a:p>
+          <a:p>
+            <a:pPr defTabSz="609585"/>
+            <a:r>
+              <a:rPr lang="en-US" sz="1267" dirty="0">
+                <a:solidFill>
+                  <a:srgbClr val="E7E6E6"/>
+                </a:solidFill>
+                <a:latin typeface="Consolas" pitchFamily="34" charset="0"/>
+                <a:ea typeface="Consolas" pitchFamily="34" charset="-122"/>
+                <a:cs typeface="Consolas" pitchFamily="34" charset="-120"/>
+              </a:rPr>
+              <a:t>import Text.XML          (readFile, def)</a:t>
+            </a:r>
+            <a:endParaRPr lang="en-US" sz="1267" dirty="0">
+              <a:solidFill>
+                <a:prstClr val="white"/>
+              </a:solidFill>
+              <a:latin typeface="Trebuchet MS" panose="020B0603020202020204"/>
+            </a:endParaRPr>
+          </a:p>
+          <a:p>
+            <a:pPr defTabSz="609585"/>
+            <a:r>
+              <a:rPr lang="en-US" sz="1267" dirty="0">
+                <a:solidFill>
+                  <a:srgbClr val="E7E6E6"/>
+                </a:solidFill>
+                <a:latin typeface="Consolas" pitchFamily="34" charset="0"/>
+                <a:ea typeface="Consolas" pitchFamily="34" charset="-122"/>
+                <a:cs typeface="Consolas" pitchFamily="34" charset="-120"/>
+              </a:rPr>
+              <a:t>import Text.XML.Cursor   (fromDocument)</a:t>
+            </a:r>
+            <a:endParaRPr lang="en-US" sz="1267" dirty="0">
+              <a:solidFill>
+                <a:prstClr val="white"/>
+              </a:solidFill>
+              <a:latin typeface="Trebuchet MS" panose="020B0603020202020204"/>
+            </a:endParaRPr>
+          </a:p>
+          <a:p>
+            <a:pPr defTabSz="609585"/>
+            <a:r>
+              <a:rPr lang="en-US" sz="1267" dirty="0">
+                <a:solidFill>
+                  <a:srgbClr val="E7E6E6"/>
+                </a:solidFill>
+                <a:latin typeface="Consolas" pitchFamily="34" charset="0"/>
+                <a:ea typeface="Consolas" pitchFamily="34" charset="-122"/>
+                <a:cs typeface="Consolas" pitchFamily="34" charset="-120"/>
+              </a:rPr>
+              <a:t>import Prelude hiding    (readFile)</a:t>
+            </a:r>
+            <a:endParaRPr lang="en-US" sz="1267" dirty="0">
+              <a:solidFill>
+                <a:prstClr val="white"/>
+              </a:solidFill>
+              <a:latin typeface="Trebuchet MS" panose="020B0603020202020204"/>
+            </a:endParaRPr>
+          </a:p>
+          <a:p>
+            <a:pPr defTabSz="609585"/>
+            <a:r>
+              <a:rPr lang="en-US" sz="1267" dirty="0">
+                <a:solidFill>
+                  <a:srgbClr val="E7E6E6"/>
+                </a:solidFill>
+                <a:latin typeface="Consolas" pitchFamily="34" charset="0"/>
+                <a:ea typeface="Consolas" pitchFamily="34" charset="-122"/>
+                <a:cs typeface="Consolas" pitchFamily="34" charset="-120"/>
+              </a:rPr>
+              <a:t>import System.Environment (getArgs)</a:t>
+            </a:r>
+            <a:endParaRPr lang="en-US" sz="1267" dirty="0">
+              <a:solidFill>
+                <a:prstClr val="white"/>
+              </a:solidFill>
+              <a:latin typeface="Trebuchet MS" panose="020B0603020202020204"/>
+            </a:endParaRPr>
+          </a:p>
+          <a:p>
+            <a:pPr defTabSz="609585"/>
+            <a:endParaRPr lang="en-US" sz="1267" dirty="0">
+              <a:solidFill>
+                <a:prstClr val="white"/>
+              </a:solidFill>
+              <a:latin typeface="Trebuchet MS" panose="020B0603020202020204"/>
+            </a:endParaRPr>
+          </a:p>
+          <a:p>
+            <a:pPr defTabSz="609585"/>
+            <a:r>
+              <a:rPr lang="en-US" sz="1267" dirty="0">
+                <a:solidFill>
+                  <a:srgbClr val="E7E6E6"/>
+                </a:solidFill>
+                <a:latin typeface="Consolas" pitchFamily="34" charset="0"/>
+                <a:ea typeface="Consolas" pitchFamily="34" charset="-122"/>
+                <a:cs typeface="Consolas" pitchFamily="34" charset="-120"/>
+              </a:rPr>
+              <a:t>main :: IO ()</a:t>
+            </a:r>
+            <a:endParaRPr lang="en-US" sz="1267" dirty="0">
+              <a:solidFill>
+                <a:prstClr val="white"/>
+              </a:solidFill>
+              <a:latin typeface="Trebuchet MS" panose="020B0603020202020204"/>
+            </a:endParaRPr>
+          </a:p>
+          <a:p>
+            <a:pPr defTabSz="609585"/>
+            <a:r>
+              <a:rPr lang="en-US" sz="1267" dirty="0">
+                <a:solidFill>
+                  <a:srgbClr val="E7E6E6"/>
+                </a:solidFill>
+                <a:latin typeface="Consolas" pitchFamily="34" charset="0"/>
+                <a:ea typeface="Consolas" pitchFamily="34" charset="-122"/>
+                <a:cs typeface="Consolas" pitchFamily="34" charset="-120"/>
+              </a:rPr>
+              <a:t>main = do</a:t>
+            </a:r>
+            <a:endParaRPr lang="en-US" sz="1267" dirty="0">
+              <a:solidFill>
+                <a:prstClr val="white"/>
+              </a:solidFill>
+              <a:latin typeface="Trebuchet MS" panose="020B0603020202020204"/>
+            </a:endParaRPr>
+          </a:p>
+          <a:p>
+            <a:pPr defTabSz="609585"/>
+            <a:r>
+              <a:rPr lang="en-US" sz="1267" dirty="0">
+                <a:solidFill>
+                  <a:srgbClr val="E7E6E6"/>
+                </a:solidFill>
+                <a:latin typeface="Consolas" pitchFamily="34" charset="0"/>
+                <a:ea typeface="Consolas" pitchFamily="34" charset="-122"/>
+                <a:cs typeface="Consolas" pitchFamily="34" charset="-120"/>
+              </a:rPr>
+              <a:t>      doc   &lt;- </a:t>
+            </a:r>
+            <a:r>
+              <a:rPr lang="en-US" sz="1267" dirty="0" err="1">
+                <a:solidFill>
+                  <a:srgbClr val="E7E6E6"/>
+                </a:solidFill>
+                <a:latin typeface="Consolas" pitchFamily="34" charset="0"/>
+                <a:ea typeface="Consolas" pitchFamily="34" charset="-122"/>
+                <a:cs typeface="Consolas" pitchFamily="34" charset="-120"/>
+              </a:rPr>
+              <a:t>Text.XML.readFile</a:t>
+            </a:r>
+            <a:r>
+              <a:rPr lang="en-US" sz="1267" dirty="0">
+                <a:solidFill>
+                  <a:srgbClr val="E7E6E6"/>
+                </a:solidFill>
+                <a:latin typeface="Consolas" pitchFamily="34" charset="0"/>
+                <a:ea typeface="Consolas" pitchFamily="34" charset="-122"/>
+                <a:cs typeface="Consolas" pitchFamily="34" charset="-120"/>
+              </a:rPr>
+              <a:t> def “</a:t>
+            </a:r>
+            <a:r>
+              <a:rPr lang="en-US" sz="1267" dirty="0" err="1">
+                <a:solidFill>
+                  <a:srgbClr val="E7E6E6"/>
+                </a:solidFill>
+                <a:latin typeface="Consolas" pitchFamily="34" charset="0"/>
+                <a:ea typeface="Consolas" pitchFamily="34" charset="-122"/>
+                <a:cs typeface="Consolas" pitchFamily="34" charset="-120"/>
+              </a:rPr>
+              <a:t>books.xml</a:t>
+            </a:r>
+            <a:r>
+              <a:rPr lang="en-US" sz="1267" dirty="0">
+                <a:solidFill>
+                  <a:srgbClr val="E7E6E6"/>
+                </a:solidFill>
+                <a:latin typeface="Consolas" pitchFamily="34" charset="0"/>
+                <a:ea typeface="Consolas" pitchFamily="34" charset="-122"/>
+                <a:cs typeface="Consolas" pitchFamily="34" charset="-120"/>
+              </a:rPr>
+              <a:t>”</a:t>
+            </a:r>
+            <a:endParaRPr lang="en-US" sz="1267" dirty="0">
+              <a:solidFill>
+                <a:prstClr val="white"/>
+              </a:solidFill>
+              <a:latin typeface="Trebuchet MS" panose="020B0603020202020204"/>
+            </a:endParaRPr>
+          </a:p>
+          <a:p>
+            <a:pPr defTabSz="609585"/>
+            <a:r>
+              <a:rPr lang="en-US" sz="1267" dirty="0">
+                <a:solidFill>
+                  <a:srgbClr val="E7E6E6"/>
+                </a:solidFill>
+                <a:latin typeface="Consolas" pitchFamily="34" charset="0"/>
+                <a:ea typeface="Consolas" pitchFamily="34" charset="-122"/>
+                <a:cs typeface="Consolas" pitchFamily="34" charset="-120"/>
+              </a:rPr>
+              <a:t>      let books = parseCatalogue doc</a:t>
+            </a:r>
+            <a:endParaRPr lang="en-US" sz="1267" dirty="0">
+              <a:solidFill>
+                <a:prstClr val="white"/>
+              </a:solidFill>
+              <a:latin typeface="Trebuchet MS" panose="020B0603020202020204"/>
+            </a:endParaRPr>
+          </a:p>
+          <a:p>
+            <a:pPr defTabSz="609585"/>
+            <a:r>
+              <a:rPr lang="en-US" sz="1267" dirty="0">
+                <a:solidFill>
+                  <a:srgbClr val="E7E6E6"/>
+                </a:solidFill>
+                <a:latin typeface="Consolas" pitchFamily="34" charset="0"/>
+                <a:ea typeface="Consolas" pitchFamily="34" charset="-122"/>
+                <a:cs typeface="Consolas" pitchFamily="34" charset="-120"/>
+              </a:rPr>
+              <a:t>      putStrLn $ "Parsed " ++ show (length books) ++ " book(s)."</a:t>
+            </a:r>
+            <a:endParaRPr lang="en-US" sz="1267" dirty="0">
+              <a:solidFill>
+                <a:prstClr val="white"/>
+              </a:solidFill>
+              <a:latin typeface="Trebuchet MS" panose="020B0603020202020204"/>
+            </a:endParaRPr>
+          </a:p>
+          <a:p>
+            <a:pPr defTabSz="609585"/>
+            <a:r>
+              <a:rPr lang="en-US" sz="1267" dirty="0">
+                <a:solidFill>
+                  <a:srgbClr val="E7E6E6"/>
+                </a:solidFill>
+                <a:latin typeface="Consolas" pitchFamily="34" charset="0"/>
+                <a:ea typeface="Consolas" pitchFamily="34" charset="-122"/>
+                <a:cs typeface="Consolas" pitchFamily="34" charset="-120"/>
+              </a:rPr>
+              <a:t>      </a:t>
+            </a:r>
+            <a:r>
+              <a:rPr lang="en-US" sz="1267" dirty="0" err="1">
+                <a:solidFill>
+                  <a:srgbClr val="E7E6E6"/>
+                </a:solidFill>
+                <a:latin typeface="Consolas" pitchFamily="34" charset="0"/>
+                <a:ea typeface="Consolas" pitchFamily="34" charset="-122"/>
+                <a:cs typeface="Consolas" pitchFamily="34" charset="-120"/>
+              </a:rPr>
+              <a:t>writeCatalogue</a:t>
+            </a:r>
+            <a:r>
+              <a:rPr lang="en-US" sz="1267" dirty="0">
+                <a:solidFill>
+                  <a:srgbClr val="E7E6E6"/>
+                </a:solidFill>
+                <a:latin typeface="Consolas" pitchFamily="34" charset="0"/>
+                <a:ea typeface="Consolas" pitchFamily="34" charset="-122"/>
+                <a:cs typeface="Consolas" pitchFamily="34" charset="-120"/>
+              </a:rPr>
+              <a:t> books</a:t>
+            </a:r>
+            <a:endParaRPr lang="en-US" sz="1267" dirty="0">
+              <a:solidFill>
+                <a:prstClr val="white"/>
+              </a:solidFill>
+              <a:latin typeface="Trebuchet MS" panose="020B0603020202020204"/>
+            </a:endParaRPr>
+          </a:p>
+          <a:p>
+            <a:pPr defTabSz="609585"/>
+            <a:r>
+              <a:rPr lang="en-US" sz="1267" dirty="0">
+                <a:solidFill>
+                  <a:srgbClr val="E7E6E6"/>
+                </a:solidFill>
+                <a:latin typeface="Consolas" pitchFamily="34" charset="0"/>
+                <a:ea typeface="Consolas" pitchFamily="34" charset="-122"/>
+                <a:cs typeface="Consolas" pitchFamily="34" charset="-120"/>
+              </a:rPr>
+              <a:t>      putStrLn $ "Written to " ++ mdPath</a:t>
+            </a:r>
+            <a:endParaRPr lang="en-US" sz="1267" dirty="0">
+              <a:solidFill>
+                <a:prstClr val="white"/>
+              </a:solidFill>
+              <a:latin typeface="Trebuchet MS" panose="020B0603020202020204"/>
+            </a:endParaRPr>
+          </a:p>
+          <a:p>
+            <a:pPr defTabSz="609585"/>
+            <a:r>
+              <a:rPr lang="en-US" sz="1267" dirty="0">
+                <a:solidFill>
+                  <a:srgbClr val="E7E6E6"/>
+                </a:solidFill>
+                <a:latin typeface="Consolas" pitchFamily="34" charset="0"/>
+                <a:ea typeface="Consolas" pitchFamily="34" charset="-122"/>
+                <a:cs typeface="Consolas" pitchFamily="34" charset="-120"/>
+              </a:rPr>
+              <a:t>   </a:t>
+            </a:r>
+            <a:endParaRPr lang="en-US" sz="1267" dirty="0">
+              <a:solidFill>
+                <a:prstClr val="white"/>
+              </a:solidFill>
+              <a:latin typeface="Trebuchet MS" panose="020B0603020202020204"/>
+            </a:endParaRPr>
+          </a:p>
+        </p:txBody>
+      </p:sp>
+      <p:sp>
+        <p:nvSpPr>
+          <p:cNvPr id="10" name="Shape 8"/>
+          <p:cNvSpPr/>
+          <p:nvPr/>
+        </p:nvSpPr>
+        <p:spPr>
+          <a:xfrm>
+            <a:off x="7985760" y="1158240"/>
+            <a:ext cx="548640" cy="548640"/>
+          </a:xfrm>
+          <a:prstGeom prst="ellipse">
+            <a:avLst/>
+          </a:prstGeom>
+          <a:solidFill>
+            <a:srgbClr val="39CDE7"/>
+          </a:solidFill>
+          <a:ln w="12700">
+            <a:solidFill>
+              <a:srgbClr val="39CDE7"/>
+            </a:solidFill>
+            <a:prstDash val="solid"/>
+          </a:ln>
+        </p:spPr>
+        <p:txBody>
+          <a:bodyPr/>
+          <a:lstStyle/>
+          <a:p>
+            <a:pPr defTabSz="609585"/>
+            <a:endParaRPr lang="en-US" sz="2400">
+              <a:solidFill>
+                <a:prstClr val="white"/>
+              </a:solidFill>
+              <a:latin typeface="Trebuchet MS" panose="020B0603020202020204"/>
+            </a:endParaRPr>
+          </a:p>
+        </p:txBody>
+      </p:sp>
+      <p:sp>
+        <p:nvSpPr>
+          <p:cNvPr id="11" name="Text 9"/>
+          <p:cNvSpPr/>
+          <p:nvPr/>
+        </p:nvSpPr>
+        <p:spPr>
+          <a:xfrm>
+            <a:off x="7985760" y="1158240"/>
+            <a:ext cx="548640" cy="548640"/>
+          </a:xfrm>
+          <a:prstGeom prst="rect">
+            <a:avLst/>
+          </a:prstGeom>
+          <a:noFill/>
+          <a:ln/>
+        </p:spPr>
+        <p:txBody>
+          <a:bodyPr wrap="square" lIns="0" tIns="0" rIns="0" bIns="0" rtlCol="0" anchor="ctr"/>
+          <a:lstStyle/>
+          <a:p>
+            <a:pPr algn="ctr" defTabSz="609585"/>
+            <a:r>
+              <a:rPr lang="en-US" sz="2000" b="1" dirty="0">
+                <a:solidFill>
+                  <a:srgbClr val="1A1A2E"/>
+                </a:solidFill>
+                <a:latin typeface="Trebuchet MS" pitchFamily="34" charset="0"/>
+                <a:ea typeface="Trebuchet MS" pitchFamily="34" charset="-122"/>
+                <a:cs typeface="Trebuchet MS" pitchFamily="34" charset="-120"/>
+              </a:rPr>
+              <a:t>1</a:t>
+            </a:r>
+            <a:endParaRPr lang="en-US" sz="2000" dirty="0">
+              <a:solidFill>
+                <a:prstClr val="white"/>
+              </a:solidFill>
+              <a:latin typeface="Trebuchet MS" panose="020B0603020202020204"/>
+            </a:endParaRPr>
+          </a:p>
+        </p:txBody>
+      </p:sp>
+      <p:sp>
+        <p:nvSpPr>
+          <p:cNvPr id="12" name="Text 10"/>
+          <p:cNvSpPr/>
+          <p:nvPr/>
+        </p:nvSpPr>
+        <p:spPr>
+          <a:xfrm>
+            <a:off x="8656320" y="1170432"/>
+            <a:ext cx="3108960" cy="365760"/>
+          </a:xfrm>
+          <a:prstGeom prst="rect">
+            <a:avLst/>
+          </a:prstGeom>
+          <a:noFill/>
+          <a:ln/>
+        </p:spPr>
+        <p:txBody>
+          <a:bodyPr wrap="square" lIns="0" tIns="0" rIns="0" bIns="0" rtlCol="0" anchor="ctr"/>
+          <a:lstStyle/>
+          <a:p>
+            <a:pPr defTabSz="609585"/>
+            <a:r>
+              <a:rPr lang="en-US" sz="1600" b="1" dirty="0">
+                <a:solidFill>
+                  <a:srgbClr val="FFFFFF"/>
+                </a:solidFill>
+                <a:latin typeface="Trebuchet MS" pitchFamily="34" charset="0"/>
+                <a:ea typeface="Trebuchet MS" pitchFamily="34" charset="-122"/>
+                <a:cs typeface="Trebuchet MS" pitchFamily="34" charset="-120"/>
+              </a:rPr>
+              <a:t>Read XML</a:t>
+            </a:r>
+            <a:endParaRPr lang="en-US" sz="1600" dirty="0">
+              <a:solidFill>
+                <a:prstClr val="white"/>
+              </a:solidFill>
+              <a:latin typeface="Trebuchet MS" panose="020B0603020202020204"/>
+            </a:endParaRPr>
+          </a:p>
+        </p:txBody>
+      </p:sp>
+      <p:sp>
+        <p:nvSpPr>
+          <p:cNvPr id="13" name="Text 11"/>
+          <p:cNvSpPr/>
+          <p:nvPr/>
+        </p:nvSpPr>
+        <p:spPr>
+          <a:xfrm>
+            <a:off x="8656320" y="1548384"/>
+            <a:ext cx="3108960" cy="792480"/>
+          </a:xfrm>
+          <a:prstGeom prst="rect">
+            <a:avLst/>
+          </a:prstGeom>
+          <a:noFill/>
+          <a:ln/>
+        </p:spPr>
+        <p:txBody>
+          <a:bodyPr wrap="square" lIns="0" tIns="0" rIns="0" bIns="0" rtlCol="0" anchor="t"/>
+          <a:lstStyle/>
+          <a:p>
+            <a:pPr defTabSz="609585"/>
+            <a:r>
+              <a:rPr lang="en-US" sz="1333" dirty="0">
+                <a:solidFill>
+                  <a:srgbClr val="E7E6E6"/>
+                </a:solidFill>
+                <a:latin typeface="Trebuchet MS" pitchFamily="34" charset="0"/>
+                <a:ea typeface="Trebuchet MS" pitchFamily="34" charset="-122"/>
+                <a:cs typeface="Trebuchet MS" pitchFamily="34" charset="-120"/>
+              </a:rPr>
+              <a:t>readFile parses the file into a Document, throwing on malformed XML.</a:t>
+            </a:r>
+            <a:endParaRPr lang="en-US" sz="1333" dirty="0">
+              <a:solidFill>
+                <a:prstClr val="white"/>
+              </a:solidFill>
+              <a:latin typeface="Trebuchet MS" panose="020B0603020202020204"/>
+            </a:endParaRPr>
+          </a:p>
+        </p:txBody>
+      </p:sp>
+      <p:sp>
+        <p:nvSpPr>
+          <p:cNvPr id="14" name="Shape 12"/>
+          <p:cNvSpPr/>
+          <p:nvPr/>
+        </p:nvSpPr>
+        <p:spPr>
+          <a:xfrm>
+            <a:off x="8229600" y="1743456"/>
+            <a:ext cx="60960" cy="670560"/>
+          </a:xfrm>
+          <a:prstGeom prst="rect">
+            <a:avLst/>
+          </a:prstGeom>
+          <a:solidFill>
+            <a:srgbClr val="39CDE7"/>
+          </a:solidFill>
+          <a:ln w="12700">
+            <a:solidFill>
+              <a:srgbClr val="39CDE7"/>
+            </a:solidFill>
+            <a:prstDash val="solid"/>
+          </a:ln>
+        </p:spPr>
+        <p:txBody>
+          <a:bodyPr/>
+          <a:lstStyle/>
+          <a:p>
+            <a:pPr defTabSz="609585"/>
+            <a:endParaRPr lang="en-US" sz="2400">
+              <a:solidFill>
+                <a:prstClr val="white"/>
+              </a:solidFill>
+              <a:latin typeface="Trebuchet MS" panose="020B0603020202020204"/>
+            </a:endParaRPr>
+          </a:p>
+        </p:txBody>
+      </p:sp>
+      <p:sp>
+        <p:nvSpPr>
+          <p:cNvPr id="15" name="Shape 13"/>
+          <p:cNvSpPr/>
+          <p:nvPr/>
+        </p:nvSpPr>
+        <p:spPr>
+          <a:xfrm>
+            <a:off x="7985760" y="2523744"/>
+            <a:ext cx="548640" cy="548640"/>
+          </a:xfrm>
+          <a:prstGeom prst="ellipse">
+            <a:avLst/>
+          </a:prstGeom>
+          <a:solidFill>
+            <a:srgbClr val="39CDE7"/>
+          </a:solidFill>
+          <a:ln w="12700">
+            <a:solidFill>
+              <a:srgbClr val="39CDE7"/>
+            </a:solidFill>
+            <a:prstDash val="solid"/>
+          </a:ln>
+        </p:spPr>
+        <p:txBody>
+          <a:bodyPr/>
+          <a:lstStyle/>
+          <a:p>
+            <a:pPr defTabSz="609585"/>
+            <a:endParaRPr lang="en-US" sz="2400">
+              <a:solidFill>
+                <a:prstClr val="white"/>
+              </a:solidFill>
+              <a:latin typeface="Trebuchet MS" panose="020B0603020202020204"/>
+            </a:endParaRPr>
+          </a:p>
+        </p:txBody>
+      </p:sp>
+      <p:sp>
+        <p:nvSpPr>
+          <p:cNvPr id="16" name="Text 14"/>
+          <p:cNvSpPr/>
+          <p:nvPr/>
+        </p:nvSpPr>
+        <p:spPr>
+          <a:xfrm>
+            <a:off x="7985760" y="2523744"/>
+            <a:ext cx="548640" cy="548640"/>
+          </a:xfrm>
+          <a:prstGeom prst="rect">
+            <a:avLst/>
+          </a:prstGeom>
+          <a:noFill/>
+          <a:ln/>
+        </p:spPr>
+        <p:txBody>
+          <a:bodyPr wrap="square" lIns="0" tIns="0" rIns="0" bIns="0" rtlCol="0" anchor="ctr"/>
+          <a:lstStyle/>
+          <a:p>
+            <a:pPr algn="ctr" defTabSz="609585"/>
+            <a:r>
+              <a:rPr lang="en-US" sz="2000" b="1" dirty="0">
+                <a:solidFill>
+                  <a:srgbClr val="1A1A2E"/>
+                </a:solidFill>
+                <a:latin typeface="Trebuchet MS" pitchFamily="34" charset="0"/>
+                <a:ea typeface="Trebuchet MS" pitchFamily="34" charset="-122"/>
+                <a:cs typeface="Trebuchet MS" pitchFamily="34" charset="-120"/>
+              </a:rPr>
+              <a:t>2</a:t>
+            </a:r>
+            <a:endParaRPr lang="en-US" sz="2000" dirty="0">
+              <a:solidFill>
+                <a:prstClr val="white"/>
+              </a:solidFill>
+              <a:latin typeface="Trebuchet MS" panose="020B0603020202020204"/>
+            </a:endParaRPr>
+          </a:p>
+        </p:txBody>
+      </p:sp>
+      <p:sp>
+        <p:nvSpPr>
+          <p:cNvPr id="17" name="Text 15"/>
+          <p:cNvSpPr/>
+          <p:nvPr/>
+        </p:nvSpPr>
+        <p:spPr>
+          <a:xfrm>
+            <a:off x="8656320" y="2535936"/>
+            <a:ext cx="3108960" cy="365760"/>
+          </a:xfrm>
+          <a:prstGeom prst="rect">
+            <a:avLst/>
+          </a:prstGeom>
+          <a:noFill/>
+          <a:ln/>
+        </p:spPr>
+        <p:txBody>
+          <a:bodyPr wrap="square" lIns="0" tIns="0" rIns="0" bIns="0" rtlCol="0" anchor="ctr"/>
+          <a:lstStyle/>
+          <a:p>
+            <a:pPr defTabSz="609585"/>
+            <a:r>
+              <a:rPr lang="en-US" sz="1600" b="1" dirty="0">
+                <a:solidFill>
+                  <a:srgbClr val="FFFFFF"/>
+                </a:solidFill>
+                <a:latin typeface="Trebuchet MS" pitchFamily="34" charset="0"/>
+                <a:ea typeface="Trebuchet MS" pitchFamily="34" charset="-122"/>
+                <a:cs typeface="Trebuchet MS" pitchFamily="34" charset="-120"/>
+              </a:rPr>
+              <a:t>Parse</a:t>
+            </a:r>
+            <a:endParaRPr lang="en-US" sz="1600" dirty="0">
+              <a:solidFill>
+                <a:prstClr val="white"/>
+              </a:solidFill>
+              <a:latin typeface="Trebuchet MS" panose="020B0603020202020204"/>
+            </a:endParaRPr>
+          </a:p>
+        </p:txBody>
+      </p:sp>
+      <p:sp>
+        <p:nvSpPr>
+          <p:cNvPr id="18" name="Text 16"/>
+          <p:cNvSpPr/>
+          <p:nvPr/>
+        </p:nvSpPr>
+        <p:spPr>
+          <a:xfrm>
+            <a:off x="8656320" y="2913888"/>
+            <a:ext cx="3108960" cy="792480"/>
+          </a:xfrm>
+          <a:prstGeom prst="rect">
+            <a:avLst/>
+          </a:prstGeom>
+          <a:noFill/>
+          <a:ln/>
+        </p:spPr>
+        <p:txBody>
+          <a:bodyPr wrap="square" lIns="0" tIns="0" rIns="0" bIns="0" rtlCol="0" anchor="t"/>
+          <a:lstStyle/>
+          <a:p>
+            <a:pPr defTabSz="609585"/>
+            <a:r>
+              <a:rPr lang="en-US" sz="1333" dirty="0">
+                <a:solidFill>
+                  <a:srgbClr val="E7E6E6"/>
+                </a:solidFill>
+                <a:latin typeface="Trebuchet MS" pitchFamily="34" charset="0"/>
+                <a:ea typeface="Trebuchet MS" pitchFamily="34" charset="-122"/>
+                <a:cs typeface="Trebuchet MS" pitchFamily="34" charset="-120"/>
+              </a:rPr>
+              <a:t>parseCatalogue walks the cursor tree → [Book].</a:t>
+            </a:r>
+            <a:endParaRPr lang="en-US" sz="1333" dirty="0">
+              <a:solidFill>
+                <a:prstClr val="white"/>
+              </a:solidFill>
+              <a:latin typeface="Trebuchet MS" panose="020B0603020202020204"/>
+            </a:endParaRPr>
+          </a:p>
+        </p:txBody>
+      </p:sp>
+      <p:sp>
+        <p:nvSpPr>
+          <p:cNvPr id="19" name="Shape 17"/>
+          <p:cNvSpPr/>
+          <p:nvPr/>
+        </p:nvSpPr>
+        <p:spPr>
+          <a:xfrm>
+            <a:off x="8229600" y="3108960"/>
+            <a:ext cx="60960" cy="670560"/>
+          </a:xfrm>
+          <a:prstGeom prst="rect">
+            <a:avLst/>
+          </a:prstGeom>
+          <a:solidFill>
+            <a:srgbClr val="39CDE7"/>
+          </a:solidFill>
+          <a:ln w="12700">
+            <a:solidFill>
+              <a:srgbClr val="39CDE7"/>
+            </a:solidFill>
+            <a:prstDash val="solid"/>
+          </a:ln>
+        </p:spPr>
+        <p:txBody>
+          <a:bodyPr/>
+          <a:lstStyle/>
+          <a:p>
+            <a:pPr defTabSz="609585"/>
+            <a:endParaRPr lang="en-US" sz="2400">
+              <a:solidFill>
+                <a:prstClr val="white"/>
+              </a:solidFill>
+              <a:latin typeface="Trebuchet MS" panose="020B0603020202020204"/>
+            </a:endParaRPr>
+          </a:p>
+        </p:txBody>
+      </p:sp>
+      <p:sp>
+        <p:nvSpPr>
+          <p:cNvPr id="20" name="Shape 18"/>
+          <p:cNvSpPr/>
+          <p:nvPr/>
+        </p:nvSpPr>
+        <p:spPr>
+          <a:xfrm>
+            <a:off x="7985760" y="3889248"/>
+            <a:ext cx="548640" cy="548640"/>
+          </a:xfrm>
+          <a:prstGeom prst="ellipse">
+            <a:avLst/>
+          </a:prstGeom>
+          <a:solidFill>
+            <a:srgbClr val="39CDE7"/>
+          </a:solidFill>
+          <a:ln w="12700">
+            <a:solidFill>
+              <a:srgbClr val="39CDE7"/>
+            </a:solidFill>
+            <a:prstDash val="solid"/>
+          </a:ln>
+        </p:spPr>
+        <p:txBody>
+          <a:bodyPr/>
+          <a:lstStyle/>
+          <a:p>
+            <a:pPr defTabSz="609585"/>
+            <a:endParaRPr lang="en-US" sz="2400">
+              <a:solidFill>
+                <a:prstClr val="white"/>
+              </a:solidFill>
+              <a:latin typeface="Trebuchet MS" panose="020B0603020202020204"/>
+            </a:endParaRPr>
+          </a:p>
+        </p:txBody>
+      </p:sp>
+      <p:sp>
+        <p:nvSpPr>
+          <p:cNvPr id="21" name="Text 19"/>
+          <p:cNvSpPr/>
+          <p:nvPr/>
+        </p:nvSpPr>
+        <p:spPr>
+          <a:xfrm>
+            <a:off x="7985760" y="3889248"/>
+            <a:ext cx="548640" cy="548640"/>
+          </a:xfrm>
+          <a:prstGeom prst="rect">
+            <a:avLst/>
+          </a:prstGeom>
+          <a:noFill/>
+          <a:ln/>
+        </p:spPr>
+        <p:txBody>
+          <a:bodyPr wrap="square" lIns="0" tIns="0" rIns="0" bIns="0" rtlCol="0" anchor="ctr"/>
+          <a:lstStyle/>
+          <a:p>
+            <a:pPr algn="ctr" defTabSz="609585"/>
+            <a:r>
+              <a:rPr lang="en-US" sz="2000" b="1" dirty="0">
+                <a:solidFill>
+                  <a:srgbClr val="1A1A2E"/>
+                </a:solidFill>
+                <a:latin typeface="Trebuchet MS" pitchFamily="34" charset="0"/>
+                <a:ea typeface="Trebuchet MS" pitchFamily="34" charset="-122"/>
+                <a:cs typeface="Trebuchet MS" pitchFamily="34" charset="-120"/>
+              </a:rPr>
+              <a:t>3</a:t>
+            </a:r>
+            <a:endParaRPr lang="en-US" sz="2000" dirty="0">
+              <a:solidFill>
+                <a:prstClr val="white"/>
+              </a:solidFill>
+              <a:latin typeface="Trebuchet MS" panose="020B0603020202020204"/>
+            </a:endParaRPr>
+          </a:p>
+        </p:txBody>
+      </p:sp>
+      <p:sp>
+        <p:nvSpPr>
+          <p:cNvPr id="22" name="Text 20"/>
+          <p:cNvSpPr/>
+          <p:nvPr/>
+        </p:nvSpPr>
+        <p:spPr>
+          <a:xfrm>
+            <a:off x="8656320" y="3901440"/>
+            <a:ext cx="3108960" cy="365760"/>
+          </a:xfrm>
+          <a:prstGeom prst="rect">
+            <a:avLst/>
+          </a:prstGeom>
+          <a:noFill/>
+          <a:ln/>
+        </p:spPr>
+        <p:txBody>
+          <a:bodyPr wrap="square" lIns="0" tIns="0" rIns="0" bIns="0" rtlCol="0" anchor="ctr"/>
+          <a:lstStyle/>
+          <a:p>
+            <a:pPr defTabSz="609585"/>
+            <a:r>
+              <a:rPr lang="en-US" sz="1600" b="1" dirty="0">
+                <a:solidFill>
+                  <a:srgbClr val="FFFFFF"/>
+                </a:solidFill>
+                <a:latin typeface="Trebuchet MS" pitchFamily="34" charset="0"/>
+                <a:ea typeface="Trebuchet MS" pitchFamily="34" charset="-122"/>
+                <a:cs typeface="Trebuchet MS" pitchFamily="34" charset="-120"/>
+              </a:rPr>
+              <a:t>Render</a:t>
+            </a:r>
+            <a:endParaRPr lang="en-US" sz="1600" dirty="0">
+              <a:solidFill>
+                <a:prstClr val="white"/>
+              </a:solidFill>
+              <a:latin typeface="Trebuchet MS" panose="020B0603020202020204"/>
+            </a:endParaRPr>
+          </a:p>
+        </p:txBody>
+      </p:sp>
+      <p:sp>
+        <p:nvSpPr>
+          <p:cNvPr id="23" name="Text 21"/>
+          <p:cNvSpPr/>
+          <p:nvPr/>
+        </p:nvSpPr>
+        <p:spPr>
+          <a:xfrm>
+            <a:off x="8656320" y="4279392"/>
+            <a:ext cx="3108960" cy="792480"/>
+          </a:xfrm>
+          <a:prstGeom prst="rect">
+            <a:avLst/>
+          </a:prstGeom>
+          <a:noFill/>
+          <a:ln/>
+        </p:spPr>
+        <p:txBody>
+          <a:bodyPr wrap="square" lIns="0" tIns="0" rIns="0" bIns="0" rtlCol="0" anchor="t"/>
+          <a:lstStyle/>
+          <a:p>
+            <a:pPr defTabSz="609585"/>
+            <a:r>
+              <a:rPr lang="en-US" sz="1333" dirty="0">
+                <a:solidFill>
+                  <a:srgbClr val="E7E6E6"/>
+                </a:solidFill>
+                <a:latin typeface="Trebuchet MS" pitchFamily="34" charset="0"/>
+                <a:ea typeface="Trebuchet MS" pitchFamily="34" charset="-122"/>
+                <a:cs typeface="Trebuchet MS" pitchFamily="34" charset="-120"/>
+              </a:rPr>
+              <a:t>renderCatalogue converts [Book] → Markdown String.</a:t>
+            </a:r>
+            <a:endParaRPr lang="en-US" sz="1333" dirty="0">
+              <a:solidFill>
+                <a:prstClr val="white"/>
+              </a:solidFill>
+              <a:latin typeface="Trebuchet MS" panose="020B0603020202020204"/>
+            </a:endParaRPr>
+          </a:p>
+        </p:txBody>
+      </p:sp>
+      <p:sp>
+        <p:nvSpPr>
+          <p:cNvPr id="24" name="Shape 22"/>
+          <p:cNvSpPr/>
+          <p:nvPr/>
+        </p:nvSpPr>
+        <p:spPr>
+          <a:xfrm>
+            <a:off x="8229600" y="4474464"/>
+            <a:ext cx="60960" cy="670560"/>
+          </a:xfrm>
+          <a:prstGeom prst="rect">
+            <a:avLst/>
+          </a:prstGeom>
+          <a:solidFill>
+            <a:srgbClr val="39CDE7"/>
+          </a:solidFill>
+          <a:ln w="12700">
+            <a:solidFill>
+              <a:srgbClr val="39CDE7"/>
+            </a:solidFill>
+            <a:prstDash val="solid"/>
+          </a:ln>
+        </p:spPr>
+        <p:txBody>
+          <a:bodyPr/>
+          <a:lstStyle/>
+          <a:p>
+            <a:pPr defTabSz="609585"/>
+            <a:endParaRPr lang="en-US" sz="2400">
+              <a:solidFill>
+                <a:prstClr val="white"/>
+              </a:solidFill>
+              <a:latin typeface="Trebuchet MS" panose="020B0603020202020204"/>
+            </a:endParaRPr>
+          </a:p>
+        </p:txBody>
+      </p:sp>
+      <p:sp>
+        <p:nvSpPr>
+          <p:cNvPr id="25" name="Shape 23"/>
+          <p:cNvSpPr/>
+          <p:nvPr/>
+        </p:nvSpPr>
+        <p:spPr>
+          <a:xfrm>
+            <a:off x="7985760" y="5254752"/>
+            <a:ext cx="548640" cy="548640"/>
+          </a:xfrm>
+          <a:prstGeom prst="ellipse">
+            <a:avLst/>
+          </a:prstGeom>
+          <a:solidFill>
+            <a:srgbClr val="39CDE7"/>
+          </a:solidFill>
+          <a:ln w="12700">
+            <a:solidFill>
+              <a:srgbClr val="39CDE7"/>
+            </a:solidFill>
+            <a:prstDash val="solid"/>
+          </a:ln>
+        </p:spPr>
+        <p:txBody>
+          <a:bodyPr/>
+          <a:lstStyle/>
+          <a:p>
+            <a:pPr defTabSz="609585"/>
+            <a:endParaRPr lang="en-US" sz="2400">
+              <a:solidFill>
+                <a:prstClr val="white"/>
+              </a:solidFill>
+              <a:latin typeface="Trebuchet MS" panose="020B0603020202020204"/>
+            </a:endParaRPr>
+          </a:p>
+        </p:txBody>
+      </p:sp>
+      <p:sp>
+        <p:nvSpPr>
+          <p:cNvPr id="26" name="Text 24"/>
+          <p:cNvSpPr/>
+          <p:nvPr/>
+        </p:nvSpPr>
+        <p:spPr>
+          <a:xfrm>
+            <a:off x="7985760" y="5254752"/>
+            <a:ext cx="548640" cy="548640"/>
+          </a:xfrm>
+          <a:prstGeom prst="rect">
+            <a:avLst/>
+          </a:prstGeom>
+          <a:noFill/>
+          <a:ln/>
+        </p:spPr>
+        <p:txBody>
+          <a:bodyPr wrap="square" lIns="0" tIns="0" rIns="0" bIns="0" rtlCol="0" anchor="ctr"/>
+          <a:lstStyle/>
+          <a:p>
+            <a:pPr algn="ctr" defTabSz="609585"/>
+            <a:r>
+              <a:rPr lang="en-US" sz="2000" b="1" dirty="0">
+                <a:solidFill>
+                  <a:srgbClr val="1A1A2E"/>
+                </a:solidFill>
+                <a:latin typeface="Trebuchet MS" pitchFamily="34" charset="0"/>
+                <a:ea typeface="Trebuchet MS" pitchFamily="34" charset="-122"/>
+                <a:cs typeface="Trebuchet MS" pitchFamily="34" charset="-120"/>
+              </a:rPr>
+              <a:t>4</a:t>
+            </a:r>
+            <a:endParaRPr lang="en-US" sz="2000" dirty="0">
+              <a:solidFill>
+                <a:prstClr val="white"/>
+              </a:solidFill>
+              <a:latin typeface="Trebuchet MS" panose="020B0603020202020204"/>
+            </a:endParaRPr>
+          </a:p>
+        </p:txBody>
+      </p:sp>
+      <p:sp>
+        <p:nvSpPr>
+          <p:cNvPr id="27" name="Text 25"/>
+          <p:cNvSpPr/>
+          <p:nvPr/>
+        </p:nvSpPr>
+        <p:spPr>
+          <a:xfrm>
+            <a:off x="8656320" y="5266944"/>
+            <a:ext cx="3108960" cy="365760"/>
+          </a:xfrm>
+          <a:prstGeom prst="rect">
+            <a:avLst/>
+          </a:prstGeom>
+          <a:noFill/>
+          <a:ln/>
+        </p:spPr>
+        <p:txBody>
+          <a:bodyPr wrap="square" lIns="0" tIns="0" rIns="0" bIns="0" rtlCol="0" anchor="ctr"/>
+          <a:lstStyle/>
+          <a:p>
+            <a:pPr defTabSz="609585"/>
+            <a:r>
+              <a:rPr lang="en-US" sz="1600" b="1" dirty="0">
+                <a:solidFill>
+                  <a:srgbClr val="FFFFFF"/>
+                </a:solidFill>
+                <a:latin typeface="Trebuchet MS" pitchFamily="34" charset="0"/>
+                <a:ea typeface="Trebuchet MS" pitchFamily="34" charset="-122"/>
+                <a:cs typeface="Trebuchet MS" pitchFamily="34" charset="-120"/>
+              </a:rPr>
+              <a:t>Write</a:t>
+            </a:r>
+            <a:endParaRPr lang="en-US" sz="1600" dirty="0">
+              <a:solidFill>
+                <a:prstClr val="white"/>
+              </a:solidFill>
+              <a:latin typeface="Trebuchet MS" panose="020B0603020202020204"/>
+            </a:endParaRPr>
+          </a:p>
+        </p:txBody>
+      </p:sp>
+      <p:sp>
+        <p:nvSpPr>
+          <p:cNvPr id="28" name="Text 26"/>
+          <p:cNvSpPr/>
+          <p:nvPr/>
+        </p:nvSpPr>
+        <p:spPr>
+          <a:xfrm>
+            <a:off x="8656320" y="5644896"/>
+            <a:ext cx="3108960" cy="792480"/>
+          </a:xfrm>
+          <a:prstGeom prst="rect">
+            <a:avLst/>
+          </a:prstGeom>
+          <a:noFill/>
+          <a:ln/>
+        </p:spPr>
+        <p:txBody>
+          <a:bodyPr wrap="square" lIns="0" tIns="0" rIns="0" bIns="0" rtlCol="0" anchor="t"/>
+          <a:lstStyle/>
+          <a:p>
+            <a:pPr defTabSz="609585"/>
+            <a:r>
+              <a:rPr lang="en-US" sz="1333" dirty="0">
+                <a:solidFill>
+                  <a:srgbClr val="E7E6E6"/>
+                </a:solidFill>
+                <a:latin typeface="Trebuchet MS" pitchFamily="34" charset="0"/>
+                <a:ea typeface="Trebuchet MS" pitchFamily="34" charset="-122"/>
+                <a:cs typeface="Trebuchet MS" pitchFamily="34" charset="-120"/>
+              </a:rPr>
+              <a:t>writeFile saves the result to the output path.</a:t>
+            </a:r>
+            <a:endParaRPr lang="en-US" sz="1333" dirty="0">
+              <a:solidFill>
+                <a:prstClr val="white"/>
+              </a:solidFill>
+              <a:latin typeface="Trebuchet MS" panose="020B0603020202020204"/>
+            </a:endParaRPr>
+          </a:p>
+        </p:txBody>
+      </p:sp>
+      <p:sp>
+        <p:nvSpPr>
+          <p:cNvPr id="30" name="Text 28"/>
+          <p:cNvSpPr/>
+          <p:nvPr/>
+        </p:nvSpPr>
+        <p:spPr>
+          <a:xfrm>
+            <a:off x="670560" y="5340096"/>
+            <a:ext cx="6705600" cy="731520"/>
+          </a:xfrm>
+          <a:prstGeom prst="rect">
+            <a:avLst/>
+          </a:prstGeom>
+          <a:noFill/>
+          <a:ln/>
+        </p:spPr>
+        <p:txBody>
+          <a:bodyPr wrap="square" lIns="0" tIns="0" rIns="0" bIns="0" rtlCol="0" anchor="ctr"/>
+          <a:lstStyle/>
+          <a:p>
+            <a:pPr defTabSz="609585"/>
+            <a:endParaRPr lang="en-US" sz="1733" dirty="0">
+              <a:solidFill>
+                <a:prstClr val="white"/>
+              </a:solidFill>
+              <a:latin typeface="Trebuchet MS" panose="020B0603020202020204"/>
+            </a:endParaRPr>
+          </a:p>
+        </p:txBody>
+      </p:sp>
+    </p:spTree>
+  </p:cSld>
+  <p:clrMapOvr>
+    <a:masterClrMapping/>
+  </p:clrMapOvr>
+</p:sld>
+</file>
+
+<file path=ppt/slides/slide16.xml><?xml version="1.0" encoding="utf-8"?>
+<p:sld xmlns:a="http://schemas.openxmlformats.org/drawingml/2006/main" xmlns:r="http://schemas.openxmlformats.org/officeDocument/2006/relationships" xmlns:p="http://schemas.openxmlformats.org/presentationml/2006/main">
+  <p:cSld>
+    <p:spTree>
+      <p:nvGrpSpPr>
+        <p:cNvPr id="1" name=""/>
+        <p:cNvGrpSpPr/>
+        <p:nvPr/>
+      </p:nvGrpSpPr>
+      <p:grpSpPr>
+        <a:xfrm>
+          <a:off x="0" y="0"/>
+          <a:ext cx="0" cy="0"/>
+          <a:chOff x="0" y="0"/>
+          <a:chExt cx="0" cy="0"/>
+        </a:xfrm>
+      </p:grpSpPr>
+      <p:sp>
+        <p:nvSpPr>
+          <p:cNvPr id="2" name="Shape 0"/>
+          <p:cNvSpPr/>
+          <p:nvPr/>
+        </p:nvSpPr>
+        <p:spPr>
+          <a:xfrm>
+            <a:off x="0" y="0"/>
+            <a:ext cx="12192000" cy="6858000"/>
+          </a:xfrm>
+          <a:prstGeom prst="rect">
+            <a:avLst/>
+          </a:prstGeom>
+          <a:gradFill>
+            <a:gsLst>
+              <a:gs pos="0">
+                <a:srgbClr val="1CBFCE"/>
+              </a:gs>
+              <a:gs pos="100000">
+                <a:srgbClr val="1A3B6E"/>
+              </a:gs>
+            </a:gsLst>
+            <a:lin ang="9000000" scaled="0"/>
+          </a:gradFill>
+          <a:ln w="12700">
+            <a:prstDash val="solid"/>
+          </a:ln>
+        </p:spPr>
+        <p:txBody>
+          <a:bodyPr/>
+          <a:lstStyle/>
+          <a:p>
+            <a:pPr defTabSz="609585"/>
+            <a:endParaRPr lang="en-US" sz="2400">
+              <a:solidFill>
+                <a:prstClr val="white"/>
+              </a:solidFill>
+              <a:latin typeface="Trebuchet MS" panose="020B0603020202020204"/>
+            </a:endParaRPr>
+          </a:p>
+        </p:txBody>
+      </p:sp>
+      <p:sp>
+        <p:nvSpPr>
+          <p:cNvPr id="3" name="Shape 1"/>
+          <p:cNvSpPr/>
+          <p:nvPr/>
+        </p:nvSpPr>
+        <p:spPr>
+          <a:xfrm>
+            <a:off x="0" y="0"/>
+            <a:ext cx="11155680" cy="877824"/>
+          </a:xfrm>
+          <a:prstGeom prst="rect">
+            <a:avLst/>
+          </a:prstGeom>
+          <a:solidFill>
+            <a:srgbClr val="1A1A2E"/>
+          </a:solidFill>
+          <a:ln w="12700">
+            <a:solidFill>
+              <a:srgbClr val="1A1A2E"/>
+            </a:solidFill>
+            <a:prstDash val="solid"/>
+          </a:ln>
+        </p:spPr>
+        <p:txBody>
+          <a:bodyPr/>
+          <a:lstStyle/>
+          <a:p>
+            <a:pPr defTabSz="609585"/>
+            <a:endParaRPr lang="en-US" sz="2400">
+              <a:solidFill>
+                <a:prstClr val="white"/>
+              </a:solidFill>
+              <a:latin typeface="Trebuchet MS" panose="020B0603020202020204"/>
+            </a:endParaRPr>
+          </a:p>
+        </p:txBody>
+      </p:sp>
+      <p:sp>
+        <p:nvSpPr>
+          <p:cNvPr id="4" name="Text 2"/>
+          <p:cNvSpPr/>
+          <p:nvPr/>
+        </p:nvSpPr>
+        <p:spPr>
+          <a:xfrm>
+            <a:off x="487680" y="0"/>
+            <a:ext cx="10607040" cy="877824"/>
+          </a:xfrm>
+          <a:prstGeom prst="rect">
+            <a:avLst/>
+          </a:prstGeom>
+          <a:noFill/>
+          <a:ln/>
+        </p:spPr>
+        <p:txBody>
+          <a:bodyPr wrap="square" lIns="0" tIns="0" rIns="0" bIns="0" rtlCol="0" anchor="ctr"/>
+          <a:lstStyle/>
+          <a:p>
+            <a:pPr defTabSz="609585"/>
+            <a:r>
+              <a:rPr lang="en-US" sz="2933" dirty="0">
+                <a:solidFill>
+                  <a:srgbClr val="FFFFFF"/>
+                </a:solidFill>
+                <a:latin typeface="Trebuchet MS" pitchFamily="34" charset="0"/>
+                <a:ea typeface="Trebuchet MS" pitchFamily="34" charset="-122"/>
+                <a:cs typeface="Trebuchet MS" pitchFamily="34" charset="-120"/>
+              </a:rPr>
               <a:t>Extension: One .md File per Book</a:t>
             </a:r>
             <a:endParaRPr lang="en-US" sz="2933" dirty="0">
@@ -17692,7 +18848,7 @@
 </p:sld>
 </file>
 
-<file path=ppt/slides/slide15.xml><?xml version="1.0" encoding="utf-8"?>
+<file path=ppt/slides/slide17.xml><?xml version="1.0" encoding="utf-8"?>
 <p:sld xmlns:a="http://schemas.openxmlformats.org/drawingml/2006/main" xmlns:r="http://schemas.openxmlformats.org/officeDocument/2006/relationships" xmlns:p="http://schemas.openxmlformats.org/presentationml/2006/main">
   <p:cSld>
     <p:spTree>
